--- a/downloads/DCT_V2_Ch04_Slides.pptx
+++ b/downloads/DCT_V2_Ch04_Slides.pptx
@@ -130,7 +130,7 @@
   <p:extLst>
     <p:ext uri="{521415D9-36F7-43E2-AB2F-B90AF26B5E84}">
       <p14:sectionLst xmlns:p14="http://schemas.microsoft.com/office/powerpoint/2010/main">
-        <p14:section name="Opening" id="{94e5c284-e2f2-a051-6a56-f362a9c29721}">
+        <p14:section name="Opening" id="{0bd4d3c8-8bc2-30e1-8dd9-7502d7383a65}">
           <p14:sldIdLst>
             <p14:sldId id="256"/>
             <p14:sldId id="257"/>
@@ -138,42 +138,42 @@
             <p14:sldId id="259"/>
           </p14:sldIdLst>
         </p14:section>
-        <p14:section name="4.1 What Is Lost Beyond Convexity" id="{dce9b1dd-81f9-373c-cb48-90ad8223cffa}">
+        <p14:section name="4.1 What Is Lost Beyond Convexity" id="{f897a034-23ac-0289-4320-79fd397b2327}">
           <p14:sldIdLst>
             <p14:sldId id="260"/>
             <p14:sldId id="261"/>
           </p14:sldIdLst>
         </p14:section>
-        <p14:section name="4.2 Local Answers" id="{8a642f65-1529-c062-12e3-9dd61759faff}">
+        <p14:section name="4.2 Local Answers" id="{eb08e8ff-0c38-3116-84f2-78ba224e8499}">
           <p14:sldIdLst>
             <p14:sldId id="262"/>
             <p14:sldId id="263"/>
           </p14:sldIdLst>
         </p14:section>
-        <p14:section name="4.3 Multipliers and Local Prices" id="{8dc2b3cb-53cd-74d5-8a21-8ff0a0f3d6dd}">
+        <p14:section name="4.3 Multipliers and Local Prices" id="{d510afc2-cb3c-c10e-55bc-9cce545cb570}">
           <p14:sldIdLst>
             <p14:sldId id="264"/>
             <p14:sldId id="265"/>
           </p14:sldIdLst>
         </p14:section>
-        <p14:section name="4.4 Searching Smooth Landscapes" id="{5f0713af-4744-7328-b07e-fd7b90c20076}">
+        <p14:section name="4.4 Searching Smooth Landscapes" id="{b0d2f33b-6920-172e-ac15-ad800a60b5d9}">
           <p14:sldIdLst>
             <p14:sldId id="266"/>
             <p14:sldId id="267"/>
           </p14:sldIdLst>
         </p14:section>
-        <p14:section name="4.5 Lumpy Decisions and Branch-and-Bound" id="{a5915b5e-17a5-9eb1-4ce0-13523a4d65c9}">
+        <p14:section name="4.5 Lumpy Decisions and Branch-and-Bound" id="{f2190cdd-1eec-2887-a7a6-9db91553b47e}">
           <p14:sldIdLst>
             <p14:sldId id="268"/>
             <p14:sldId id="269"/>
           </p14:sldIdLst>
         </p14:section>
-        <p14:section name="4.6 Decomposition, and the Road to Policies" id="{8c281daf-c30a-0d24-9156-3491edff4f4b}">
+        <p14:section name="4.6 Decomposition, and the Road to Policies" id="{c532cec4-e32a-2aa9-2c61-500462a2a16b}">
           <p14:sldIdLst>
             <p14:sldId id="270"/>
           </p14:sldIdLst>
         </p14:section>
-        <p14:section name="Worked Example 4.1" id="{c3aa3af1-78c2-4c6c-b9c2-0d2bf906fab5}">
+        <p14:section name="Worked Example 4.1" id="{7958dc1a-5935-9f70-6add-c8e0c2950f13}">
           <p14:sldIdLst>
             <p14:sldId id="271"/>
             <p14:sldId id="272"/>
@@ -182,12 +182,12 @@
             <p14:sldId id="275"/>
           </p14:sldIdLst>
         </p14:section>
-        <p14:section name="AXIOM Lab 2.4" id="{fce41602-444c-a7f1-3c8e-8e0e66afb1f6}">
+        <p14:section name="AXIOM Lab 2.4" id="{73ee25dc-bd04-6828-762c-11bef4e7db84}">
           <p14:sldIdLst>
             <p14:sldId id="276"/>
           </p14:sldIdLst>
         </p14:section>
-        <p14:section name="Close" id="{63240b99-f5bc-1346-c823-963532e63030}">
+        <p14:section name="Close" id="{225d04ec-aa7c-796f-3658-fcc23ad5ca92}">
           <p14:sldIdLst>
             <p14:sldId id="277"/>
             <p14:sldId id="278"/>

--- a/downloads/DCT_V2_Ch04_Slides.pptx
+++ b/downloads/DCT_V2_Ch04_Slides.pptx
@@ -130,7 +130,7 @@
   <p:extLst>
     <p:ext uri="{521415D9-36F7-43E2-AB2F-B90AF26B5E84}">
       <p14:sectionLst xmlns:p14="http://schemas.microsoft.com/office/powerpoint/2010/main">
-        <p14:section name="Opening" id="{0bd4d3c8-8bc2-30e1-8dd9-7502d7383a65}">
+        <p14:section name="Opening" id="{c1be8660-0c8e-7a2a-b4f6-1b88503efa1b}">
           <p14:sldIdLst>
             <p14:sldId id="256"/>
             <p14:sldId id="257"/>
@@ -138,42 +138,42 @@
             <p14:sldId id="259"/>
           </p14:sldIdLst>
         </p14:section>
-        <p14:section name="4.1 What Is Lost Beyond Convexity" id="{f897a034-23ac-0289-4320-79fd397b2327}">
+        <p14:section name="4.1 What Is Lost Beyond Convexity" id="{1225c0b0-8cb9-f82e-715a-893d7eec61c7}">
           <p14:sldIdLst>
             <p14:sldId id="260"/>
             <p14:sldId id="261"/>
           </p14:sldIdLst>
         </p14:section>
-        <p14:section name="4.2 Local Answers" id="{eb08e8ff-0c38-3116-84f2-78ba224e8499}">
+        <p14:section name="4.2 Local Answers" id="{20c0dee1-a696-0853-5daf-6faba037edbb}">
           <p14:sldIdLst>
             <p14:sldId id="262"/>
             <p14:sldId id="263"/>
           </p14:sldIdLst>
         </p14:section>
-        <p14:section name="4.3 Multipliers and Local Prices" id="{d510afc2-cb3c-c10e-55bc-9cce545cb570}">
+        <p14:section name="4.3 Multipliers and Local Prices" id="{2e1d4f9f-f57f-7059-ba77-d771b62363c2}">
           <p14:sldIdLst>
             <p14:sldId id="264"/>
             <p14:sldId id="265"/>
           </p14:sldIdLst>
         </p14:section>
-        <p14:section name="4.4 Searching Smooth Landscapes" id="{b0d2f33b-6920-172e-ac15-ad800a60b5d9}">
+        <p14:section name="4.4 Searching Smooth Landscapes" id="{e36abea4-cc83-4a1b-526d-0ab165a54121}">
           <p14:sldIdLst>
             <p14:sldId id="266"/>
             <p14:sldId id="267"/>
           </p14:sldIdLst>
         </p14:section>
-        <p14:section name="4.5 Lumpy Decisions and Branch-and-Bound" id="{f2190cdd-1eec-2887-a7a6-9db91553b47e}">
+        <p14:section name="4.5 Lumpy Decisions and Branch-and-Bound" id="{3b15628b-a4a0-1510-5c32-cb825831ae4d}">
           <p14:sldIdLst>
             <p14:sldId id="268"/>
             <p14:sldId id="269"/>
           </p14:sldIdLst>
         </p14:section>
-        <p14:section name="4.6 Decomposition, and the Road to Policies" id="{c532cec4-e32a-2aa9-2c61-500462a2a16b}">
+        <p14:section name="4.6 Decomposition, and the Road to Policies" id="{f6cfabd3-d270-df4b-1b20-c3862ffa29c5}">
           <p14:sldIdLst>
             <p14:sldId id="270"/>
           </p14:sldIdLst>
         </p14:section>
-        <p14:section name="Worked Example 4.1" id="{7958dc1a-5935-9f70-6add-c8e0c2950f13}">
+        <p14:section name="Worked Example 4.1" id="{4f8b01cf-edb2-61f1-7524-e187351560ff}">
           <p14:sldIdLst>
             <p14:sldId id="271"/>
             <p14:sldId id="272"/>
@@ -182,12 +182,12 @@
             <p14:sldId id="275"/>
           </p14:sldIdLst>
         </p14:section>
-        <p14:section name="AXIOM Lab 2.4" id="{73ee25dc-bd04-6828-762c-11bef4e7db84}">
+        <p14:section name="AXIOM Lab 2.4" id="{0bcb32d1-a4ea-5e76-97e0-ce6c0e540e99}">
           <p14:sldIdLst>
             <p14:sldId id="276"/>
           </p14:sldIdLst>
         </p14:section>
-        <p14:section name="Close" id="{225d04ec-aa7c-796f-3658-fcc23ad5ca92}">
+        <p14:section name="Close" id="{5dfc64a5-4f19-7628-a769-360c7d3b110d}">
           <p14:sldIdLst>
             <p14:sldId id="277"/>
             <p14:sldId id="278"/>

--- a/downloads/DCT_V2_Ch04_Slides.pptx
+++ b/downloads/DCT_V2_Ch04_Slides.pptx
@@ -29,9 +29,10 @@
     <p:sldId id="277" r:id="rId23"/>
     <p:sldId id="278" r:id="rId24"/>
     <p:sldId id="279" r:id="rId25"/>
+    <p:sldId id="280" r:id="rId26"/>
   </p:sldIdLst>
   <p:notesMasterIdLst>
-    <p:notesMasterId r:id="rId26"/>
+    <p:notesMasterId r:id="rId27"/>
   </p:notesMasterIdLst>
   <p:sldSz cx="12192000" cy="6858000"/>
   <p:notesSz cx="6858000" cy="12192000"/>
@@ -130,7 +131,7 @@
   <p:extLst>
     <p:ext uri="{521415D9-36F7-43E2-AB2F-B90AF26B5E84}">
       <p14:sectionLst xmlns:p14="http://schemas.microsoft.com/office/powerpoint/2010/main">
-        <p14:section name="Opening" id="{c1be8660-0c8e-7a2a-b4f6-1b88503efa1b}">
+        <p14:section name="Opening" id="{8ec1499a-38d4-fa15-db4d-03be610b440f}">
           <p14:sldIdLst>
             <p14:sldId id="256"/>
             <p14:sldId id="257"/>
@@ -138,42 +139,42 @@
             <p14:sldId id="259"/>
           </p14:sldIdLst>
         </p14:section>
-        <p14:section name="4.1 What Is Lost Beyond Convexity" id="{1225c0b0-8cb9-f82e-715a-893d7eec61c7}">
+        <p14:section name="4.1 What Is Lost Beyond Convexity" id="{ea7e621e-387e-c520-c270-e6eaebfbea84}">
           <p14:sldIdLst>
             <p14:sldId id="260"/>
             <p14:sldId id="261"/>
           </p14:sldIdLst>
         </p14:section>
-        <p14:section name="4.2 Local Answers" id="{20c0dee1-a696-0853-5daf-6faba037edbb}">
+        <p14:section name="4.2 Local Answers" id="{1a13978a-baa0-49c3-6b58-acf52a088ff5}">
           <p14:sldIdLst>
             <p14:sldId id="262"/>
             <p14:sldId id="263"/>
           </p14:sldIdLst>
         </p14:section>
-        <p14:section name="4.3 Multipliers and Local Prices" id="{2e1d4f9f-f57f-7059-ba77-d771b62363c2}">
+        <p14:section name="4.3 Multipliers and Local Prices" id="{8abf9c16-10fc-6533-af2b-84fdee96c0b9}">
           <p14:sldIdLst>
             <p14:sldId id="264"/>
             <p14:sldId id="265"/>
           </p14:sldIdLst>
         </p14:section>
-        <p14:section name="4.4 Searching Smooth Landscapes" id="{e36abea4-cc83-4a1b-526d-0ab165a54121}">
+        <p14:section name="4.4 Searching Smooth Landscapes" id="{48b8aff1-2f34-13cc-e9cc-32a521e26622}">
           <p14:sldIdLst>
             <p14:sldId id="266"/>
             <p14:sldId id="267"/>
           </p14:sldIdLst>
         </p14:section>
-        <p14:section name="4.5 Lumpy Decisions and Branch-and-Bound" id="{3b15628b-a4a0-1510-5c32-cb825831ae4d}">
+        <p14:section name="4.5 Lumpy Decisions and Branch-and-Bound" id="{9e3736f4-6106-0904-59a4-17415b9d1421}">
           <p14:sldIdLst>
             <p14:sldId id="268"/>
             <p14:sldId id="269"/>
           </p14:sldIdLst>
         </p14:section>
-        <p14:section name="4.6 Decomposition, and the Road to Policies" id="{f6cfabd3-d270-df4b-1b20-c3862ffa29c5}">
+        <p14:section name="4.6 Decomposition, and the Road to Policies" id="{4641727a-8f56-ad17-a333-909c1e3e7d55}">
           <p14:sldIdLst>
             <p14:sldId id="270"/>
           </p14:sldIdLst>
         </p14:section>
-        <p14:section name="Worked Example 4.1" id="{4f8b01cf-edb2-61f1-7524-e187351560ff}">
+        <p14:section name="Worked Example 4.1" id="{9c20795d-4182-ec86-2dbb-0a323b855215}">
           <p14:sldIdLst>
             <p14:sldId id="271"/>
             <p14:sldId id="272"/>
@@ -182,16 +183,21 @@
             <p14:sldId id="275"/>
           </p14:sldIdLst>
         </p14:section>
-        <p14:section name="AXIOM Lab 2.4" id="{0bcb32d1-a4ea-5e76-97e0-ce6c0e540e99}">
+        <p14:section name="In Practice" id="{0f833d3e-76ff-c455-ec76-55da692acf5f}">
           <p14:sldIdLst>
             <p14:sldId id="276"/>
           </p14:sldIdLst>
         </p14:section>
-        <p14:section name="Close" id="{5dfc64a5-4f19-7628-a769-360c7d3b110d}">
+        <p14:section name="AXIOM Lab 2.4" id="{d4594eb7-2e27-477c-afd6-bff7229fcab1}">
           <p14:sldIdLst>
             <p14:sldId id="277"/>
+          </p14:sldIdLst>
+        </p14:section>
+        <p14:section name="Close" id="{10d2e7c5-ba94-a9e1-839a-83c7eb5e574e}">
+          <p14:sldIdLst>
             <p14:sldId id="278"/>
             <p14:sldId id="279"/>
+            <p14:sldId id="280"/>
           </p14:sldIdLst>
         </p14:section>
       </p14:sectionLst>
@@ -1742,7 +1748,7 @@
           <a:p>
             <a:r>
               <a:rPr lang="en-US" dirty="0"/>
-              <a:t>AXIOM Lab 2.4. What to look for: different answers from different starts, each passing the first-order audit (Theorem 4.2); a saddle that only the second-order test rejects (Theorem 4.1); local prices that change by basin (Theorem 4.3); and a ceiling that bounds what no run reached, with a tree that closes the gap (Theorem 4.4).</a:t>
+              <a:t>In Practice, Chapter 4: The NFL Builds Its Season. A real organization's decision of this chapter's kind, told from its published record; every figure is cited in the book. The lesson for Meridian: Seeding buys speed and gives up the ceiling: the league gets a feasible schedule, not a certified one. Sources: NFL Football Operations; Amazon (2021); University at Buffalo CCR (2021); AWS (2023); AP (2021); Gurobi.</a:t>
             </a:r>
             <a:endParaRPr lang="en-US" dirty="0"/>
           </a:p>
@@ -1830,7 +1836,7 @@
           <a:p>
             <a:r>
               <a:rPr lang="en-US" dirty="0"/>
-              <a:t>Key Takeaways, Chapter 4.</a:t>
+              <a:t>AXIOM Lab 2.4. What to look for: different answers from different starts, each passing the first-order audit (Theorem 4.2); a saddle that only the second-order test rejects (Theorem 4.1); local prices that change by basin (Theorem 4.3); and a ceiling that bounds what no run reached, with a tree that closes the gap (Theorem 4.4).</a:t>
             </a:r>
             <a:endParaRPr lang="en-US" dirty="0"/>
           </a:p>
@@ -1918,7 +1924,7 @@
           <a:p>
             <a:r>
               <a:rPr lang="en-US" dirty="0"/>
-              <a:t>The notebook and workbook are on the course website, www.dynamiccorporatetransformation.com.</a:t>
+              <a:t>Key Takeaways, Chapter 4.</a:t>
             </a:r>
             <a:endParaRPr lang="en-US" dirty="0"/>
           </a:p>
@@ -2006,7 +2012,7 @@
           <a:p>
             <a:r>
               <a:rPr lang="en-US" dirty="0"/>
-              <a:t>Section 4.6's bridge: when decisions become rules, a family of rules with parameters turns policy design into a NEO problem, rarely convex; Part II builds the methods that exploit the structure of time instead. Chapter 5, Dynamic Enterprise Optimization.</a:t>
+              <a:t>The notebook and workbook are on the course website, www.dynamiccorporatetransformation.com.</a:t>
             </a:r>
             <a:endParaRPr lang="en-US" dirty="0"/>
           </a:p>
@@ -2030,6 +2036,94 @@
             <a:fld id="{F7021451-1387-4CA6-816F-3879F97B5CBC}" type="slidenum">
               <a:rPr lang="en-US"/>
               <a:t>24</a:t>
+            </a:fld>
+            <a:endParaRPr lang="en-US"/>
+          </a:p>
+        </p:txBody>
+      </p:sp>
+    </p:spTree>
+    <p:extLst>
+      <p:ext uri="{BB962C8B-B14F-4D97-AF65-F5344CB8AC3E}">
+        <p14:creationId xmlns:p14="http://schemas.microsoft.com/office/powerpoint/2010/main" val="1024086991"/>
+      </p:ext>
+    </p:extLst>
+  </p:cSld>
+  <p:clrMapOvr>
+    <a:masterClrMapping/>
+  </p:clrMapOvr>
+</p:notes>
+</file>
+
+<file path=ppt/notesSlides/notesSlide25.xml><?xml version="1.0" encoding="utf-8"?>
+<p:notes xmlns:a="http://schemas.openxmlformats.org/drawingml/2006/main" xmlns:r="http://schemas.openxmlformats.org/officeDocument/2006/relationships" xmlns:p="http://schemas.openxmlformats.org/presentationml/2006/main">
+  <p:cSld>
+    <p:spTree>
+      <p:nvGrpSpPr>
+        <p:cNvPr id="1" name=""/>
+        <p:cNvGrpSpPr/>
+        <p:nvPr/>
+      </p:nvGrpSpPr>
+      <p:grpSpPr>
+        <a:xfrm>
+          <a:off x="0" y="0"/>
+          <a:ext cx="0" cy="0"/>
+          <a:chOff x="0" y="0"/>
+          <a:chExt cx="0" cy="0"/>
+        </a:xfrm>
+      </p:grpSpPr>
+      <p:sp>
+        <p:nvSpPr>
+          <p:cNvPr id="2" name="Slide Image Placeholder 1"/>
+          <p:cNvSpPr>
+            <a:spLocks noGrp="1" noRot="1" noChangeAspect="1"/>
+          </p:cNvSpPr>
+          <p:nvPr>
+            <p:ph type="sldImg"/>
+          </p:nvPr>
+        </p:nvSpPr>
+        <p:spPr/>
+      </p:sp>
+      <p:sp>
+        <p:nvSpPr>
+          <p:cNvPr id="3" name="Notes Placeholder 2"/>
+          <p:cNvSpPr>
+            <a:spLocks noGrp="1"/>
+          </p:cNvSpPr>
+          <p:nvPr>
+            <p:ph type="body" idx="1"/>
+          </p:nvPr>
+        </p:nvSpPr>
+        <p:spPr/>
+        <p:txBody>
+          <a:bodyPr/>
+          <a:lstStyle/>
+          <a:p>
+            <a:r>
+              <a:rPr lang="en-US" dirty="0"/>
+              <a:t>Section 4.6's bridge: when decisions become rules, a family of rules with parameters turns policy design into a NEO problem, rarely convex; Part II builds the methods that exploit the structure of time instead. Chapter 5, Dynamic Enterprise Optimization.</a:t>
+            </a:r>
+            <a:endParaRPr lang="en-US" dirty="0"/>
+          </a:p>
+        </p:txBody>
+      </p:sp>
+      <p:sp>
+        <p:nvSpPr>
+          <p:cNvPr id="4" name="Slide Number Placeholder 3"/>
+          <p:cNvSpPr>
+            <a:spLocks noGrp="1"/>
+          </p:cNvSpPr>
+          <p:nvPr>
+            <p:ph type="sldNum" sz="quarter" idx="10"/>
+          </p:nvPr>
+        </p:nvSpPr>
+        <p:spPr/>
+        <p:txBody>
+          <a:bodyPr/>
+          <a:lstStyle/>
+          <a:p>
+            <a:fld id="{F7021451-1387-4CA6-816F-3879F97B5CBC}" type="slidenum">
+              <a:rPr lang="en-US"/>
+              <a:t>25</a:t>
             </a:fld>
             <a:endParaRPr lang="en-US"/>
           </a:p>
@@ -15934,7 +16028,7 @@
                   <a:schemeClr val="accent1"/>
                 </a:solidFill>
               </a:rPr>
-              <a:t>AXIOM LAB 2.4 · MODULE AXIOM-04</a:t>
+              <a:t>IN PRACTICE · NFL SCHEDULE</a:t>
             </a:r>
             <a:endParaRPr lang="en-US" sz="1200" dirty="0"/>
           </a:p>
@@ -15975,804 +16069,26 @@
                 <a:ea typeface="Cambria" pitchFamily="34" charset="-122"/>
                 <a:cs typeface="Cambria" pitchFamily="34" charset="-120"/>
               </a:rPr>
-              <a:t>Search, bound and branch, in AXIOM</a:t>
+              <a:t>The NFL seeds its schedule to solve it</a:t>
             </a:r>
             <a:endParaRPr lang="en-US" sz="3200" dirty="0"/>
           </a:p>
         </p:txBody>
       </p:sp>
-      <p:pic>
-        <p:nvPicPr>
-          <p:cNvPr id="5" name="AXIOM logo" descr="AXIOM">    </p:cNvPr>
-          <p:cNvPicPr>
-            <a:picLocks noChangeAspect="1"/>
-          </p:cNvPicPr>
-          <p:nvPr/>
-        </p:nvPicPr>
-        <p:blipFill>
-          <a:blip r:embed="rId1"/>
-          <a:stretch>
-            <a:fillRect/>
-          </a:stretch>
-        </p:blipFill>
-        <p:spPr>
-          <a:xfrm>
-            <a:off x="9539935" y="310896"/>
-            <a:ext cx="2103120" cy="420624"/>
-          </a:xfrm>
-          <a:prstGeom prst="rect">
-            <a:avLst/>
-          </a:prstGeom>
-        </p:spPr>
-      </p:pic>
-      <p:sp>
-        <p:nvSpPr>
-          <p:cNvPr id="6" name="Situation"/>
-          <p:cNvSpPr txBox="1"/>
-          <p:nvPr/>
-        </p:nvSpPr>
-        <p:spPr>
-          <a:xfrm>
-            <a:off x="548640" y="1645920"/>
-            <a:ext cx="11094415" cy="777240"/>
-          </a:xfrm>
-          <a:prstGeom prst="rect">
-            <a:avLst/>
-          </a:prstGeom>
-          <a:noFill/>
-          <a:ln/>
-        </p:spPr>
-        <p:txBody>
-          <a:bodyPr wrap="square" lIns="0" tIns="0" rIns="0" bIns="0" rtlCol="0" anchor="t"/>
-          <a:lstStyle/>
-          <a:p>
-            <a:pPr indent="0" marL="0">
-              <a:buNone/>
-            </a:pPr>
-            <a:r>
-              <a:rPr lang="en-US" sz="1500" dirty="0">
-                <a:solidFill>
-                  <a:schemeClr val="tx1"/>
-                </a:solidFill>
-              </a:rPr>
-              <a:t>Meridian's chief operating officer can automate plant lines in part, and her planners' optimizer returns different plans from different starts. The chief financial officer wants the inventory, an audit of each plan and a proof of the best before the board meets. Open AXIOM, choose Lab 2.4 and load the Meridian partial-round instance.</a:t>
-            </a:r>
-            <a:endParaRPr lang="en-US" sz="1500" dirty="0"/>
-          </a:p>
-        </p:txBody>
-      </p:sp>
-      <p:sp>
-        <p:nvSpPr>
-          <p:cNvPr id="7" name="Flow line"/>
+      <p:sp>
+        <p:nvSpPr>
+          <p:cNvPr id="5" name="Card"/>
           <p:cNvSpPr/>
           <p:nvPr/>
         </p:nvSpPr>
         <p:spPr>
           <a:xfrm>
-            <a:off x="1658082" y="2880360"/>
-            <a:ext cx="8875532" cy="0"/>
-          </a:xfrm>
-          <a:prstGeom prst="line">
-            <a:avLst/>
-          </a:prstGeom>
-          <a:noFill/>
-          <a:ln w="25400">
-            <a:solidFill>
-              <a:srgbClr val="C4CBD8"/>
-            </a:solidFill>
-            <a:prstDash val="solid"/>
-          </a:ln>
-        </p:spPr>
-      </p:sp>
-      <p:sp>
-        <p:nvSpPr>
-          <p:cNvPr id="8" name="Number"/>
-          <p:cNvSpPr/>
-          <p:nvPr/>
-        </p:nvSpPr>
-        <p:spPr>
-          <a:xfrm>
-            <a:off x="1383762" y="2606040"/>
-            <a:ext cx="548640" cy="548640"/>
-          </a:xfrm>
-          <a:prstGeom prst="ellipse">
-            <a:avLst/>
-          </a:prstGeom>
-          <a:solidFill>
-            <a:schemeClr val="accent1"/>
-          </a:solidFill>
-          <a:ln w="6350">
-            <a:solidFill>
-              <a:schemeClr val="accent1"/>
-            </a:solidFill>
-            <a:prstDash val="solid"/>
-          </a:ln>
-        </p:spPr>
-      </p:sp>
-      <p:sp>
-        <p:nvSpPr>
-          <p:cNvPr id="9" name="Text 5"/>
-          <p:cNvSpPr txBox="1"/>
-          <p:nvPr/>
-        </p:nvSpPr>
-        <p:spPr>
-          <a:xfrm>
-            <a:off x="1383762" y="2606040"/>
-            <a:ext cx="548640" cy="548640"/>
-          </a:xfrm>
-          <a:prstGeom prst="rect">
-            <a:avLst/>
-          </a:prstGeom>
-          <a:noFill/>
-          <a:ln/>
-        </p:spPr>
-        <p:txBody>
-          <a:bodyPr wrap="square" lIns="0" tIns="0" rIns="0" bIns="0" rtlCol="0" anchor="ctr"/>
-          <a:lstStyle/>
-          <a:p>
-            <a:pPr algn="ctr" indent="0" marL="0">
-              <a:buNone/>
-            </a:pPr>
-            <a:r>
-              <a:rPr lang="en-US" sz="1600" b="1" dirty="0">
-                <a:solidFill>
-                  <a:schemeClr val="bg1"/>
-                </a:solidFill>
-                <a:latin typeface="Calibri" pitchFamily="34" charset="0"/>
-                <a:ea typeface="Calibri" pitchFamily="34" charset="-122"/>
-                <a:cs typeface="Calibri" pitchFamily="34" charset="-120"/>
-              </a:rPr>
-              <a:t>1</a:t>
-            </a:r>
-            <a:endParaRPr lang="en-US" sz="1600" dirty="0"/>
-          </a:p>
-        </p:txBody>
-      </p:sp>
-      <p:sp>
-        <p:nvSpPr>
-          <p:cNvPr id="10" name="Flow head"/>
-          <p:cNvSpPr txBox="1"/>
-          <p:nvPr/>
-        </p:nvSpPr>
-        <p:spPr>
-          <a:xfrm>
-            <a:off x="621792" y="3291840"/>
-            <a:ext cx="2072579" cy="548640"/>
-          </a:xfrm>
-          <a:prstGeom prst="rect">
-            <a:avLst/>
-          </a:prstGeom>
-          <a:noFill/>
-          <a:ln/>
-        </p:spPr>
-        <p:txBody>
-          <a:bodyPr wrap="square" lIns="0" tIns="0" rIns="0" bIns="0" rtlCol="0" anchor="t"/>
-          <a:lstStyle/>
-          <a:p>
-            <a:pPr algn="ctr" indent="0" marL="0">
-              <a:buNone/>
-            </a:pPr>
-            <a:r>
-              <a:rPr lang="en-US" sz="1600" b="1" dirty="0">
-                <a:solidFill>
-                  <a:schemeClr val="tx1"/>
-                </a:solidFill>
-                <a:latin typeface="Cambria" pitchFamily="34" charset="0"/>
-                <a:ea typeface="Cambria" pitchFamily="34" charset="-122"/>
-                <a:cs typeface="Cambria" pitchFamily="34" charset="-120"/>
-              </a:rPr>
-              <a:t>Explore</a:t>
-            </a:r>
-            <a:endParaRPr lang="en-US" sz="1600" dirty="0"/>
-          </a:p>
-        </p:txBody>
-      </p:sp>
-      <p:sp>
-        <p:nvSpPr>
-          <p:cNvPr id="11" name="Flow text"/>
-          <p:cNvSpPr txBox="1"/>
-          <p:nvPr/>
-        </p:nvSpPr>
-        <p:spPr>
-          <a:xfrm>
-            <a:off x="640080" y="3867912"/>
-            <a:ext cx="2036003" cy="1554480"/>
-          </a:xfrm>
-          <a:prstGeom prst="rect">
-            <a:avLst/>
-          </a:prstGeom>
-          <a:noFill/>
-          <a:ln/>
-        </p:spPr>
-        <p:txBody>
-          <a:bodyPr wrap="square" lIns="0" tIns="0" rIns="0" bIns="0" rtlCol="0" anchor="t"/>
-          <a:lstStyle/>
-          <a:p>
-            <a:pPr algn="ctr" indent="0" marL="0">
-              <a:buNone/>
-            </a:pPr>
-            <a:r>
-              <a:rPr lang="en-US" sz="1400" dirty="0">
-                <a:solidFill>
-                  <a:schemeClr val="tx2"/>
-                </a:solidFill>
-              </a:rPr>
-              <a:t>Draw the value where only years 4 and 5 vary: two corner peaks, the saddle, the Hessian.</a:t>
-            </a:r>
-            <a:endParaRPr lang="en-US" sz="1400" dirty="0"/>
-          </a:p>
-        </p:txBody>
-      </p:sp>
-      <p:sp>
-        <p:nvSpPr>
-          <p:cNvPr id="12" name="Number"/>
-          <p:cNvSpPr/>
-          <p:nvPr/>
-        </p:nvSpPr>
-        <p:spPr>
-          <a:xfrm>
-            <a:off x="3602645" y="2606040"/>
-            <a:ext cx="548640" cy="548640"/>
-          </a:xfrm>
-          <a:prstGeom prst="ellipse">
-            <a:avLst/>
-          </a:prstGeom>
-          <a:solidFill>
-            <a:schemeClr val="accent1"/>
-          </a:solidFill>
-          <a:ln w="6350">
-            <a:solidFill>
-              <a:schemeClr val="accent1"/>
-            </a:solidFill>
-            <a:prstDash val="solid"/>
-          </a:ln>
-        </p:spPr>
-      </p:sp>
-      <p:sp>
-        <p:nvSpPr>
-          <p:cNvPr id="13" name="Text 9"/>
-          <p:cNvSpPr txBox="1"/>
-          <p:nvPr/>
-        </p:nvSpPr>
-        <p:spPr>
-          <a:xfrm>
-            <a:off x="3602645" y="2606040"/>
-            <a:ext cx="548640" cy="548640"/>
-          </a:xfrm>
-          <a:prstGeom prst="rect">
-            <a:avLst/>
-          </a:prstGeom>
-          <a:noFill/>
-          <a:ln/>
-        </p:spPr>
-        <p:txBody>
-          <a:bodyPr wrap="square" lIns="0" tIns="0" rIns="0" bIns="0" rtlCol="0" anchor="ctr"/>
-          <a:lstStyle/>
-          <a:p>
-            <a:pPr algn="ctr" indent="0" marL="0">
-              <a:buNone/>
-            </a:pPr>
-            <a:r>
-              <a:rPr lang="en-US" sz="1600" b="1" dirty="0">
-                <a:solidFill>
-                  <a:schemeClr val="bg1"/>
-                </a:solidFill>
-                <a:latin typeface="Calibri" pitchFamily="34" charset="0"/>
-                <a:ea typeface="Calibri" pitchFamily="34" charset="-122"/>
-                <a:cs typeface="Calibri" pitchFamily="34" charset="-120"/>
-              </a:rPr>
-              <a:t>2</a:t>
-            </a:r>
-            <a:endParaRPr lang="en-US" sz="1600" dirty="0"/>
-          </a:p>
-        </p:txBody>
-      </p:sp>
-      <p:sp>
-        <p:nvSpPr>
-          <p:cNvPr id="14" name="Flow head"/>
-          <p:cNvSpPr txBox="1"/>
-          <p:nvPr/>
-        </p:nvSpPr>
-        <p:spPr>
-          <a:xfrm>
-            <a:off x="2840675" y="3291840"/>
-            <a:ext cx="2072579" cy="548640"/>
-          </a:xfrm>
-          <a:prstGeom prst="rect">
-            <a:avLst/>
-          </a:prstGeom>
-          <a:noFill/>
-          <a:ln/>
-        </p:spPr>
-        <p:txBody>
-          <a:bodyPr wrap="square" lIns="0" tIns="0" rIns="0" bIns="0" rtlCol="0" anchor="t"/>
-          <a:lstStyle/>
-          <a:p>
-            <a:pPr algn="ctr" indent="0" marL="0">
-              <a:buNone/>
-            </a:pPr>
-            <a:r>
-              <a:rPr lang="en-US" sz="1600" b="1" dirty="0">
-                <a:solidFill>
-                  <a:schemeClr val="tx1"/>
-                </a:solidFill>
-                <a:latin typeface="Cambria" pitchFamily="34" charset="0"/>
-                <a:ea typeface="Cambria" pitchFamily="34" charset="-122"/>
-                <a:cs typeface="Cambria" pitchFamily="34" charset="-120"/>
-              </a:rPr>
-              <a:t>Search</a:t>
-            </a:r>
-            <a:endParaRPr lang="en-US" sz="1600" dirty="0"/>
-          </a:p>
-        </p:txBody>
-      </p:sp>
-      <p:sp>
-        <p:nvSpPr>
-          <p:cNvPr id="15" name="Flow text"/>
-          <p:cNvSpPr txBox="1"/>
-          <p:nvPr/>
-        </p:nvSpPr>
-        <p:spPr>
-          <a:xfrm>
-            <a:off x="2858963" y="3867912"/>
-            <a:ext cx="2036003" cy="1554480"/>
-          </a:xfrm>
-          <a:prstGeom prst="rect">
-            <a:avLst/>
-          </a:prstGeom>
-          <a:noFill/>
-          <a:ln/>
-        </p:spPr>
-        <p:txBody>
-          <a:bodyPr wrap="square" lIns="0" tIns="0" rIns="0" bIns="0" rtlCol="0" anchor="t"/>
-          <a:lstStyle/>
-          <a:p>
-            <a:pPr algn="ctr" indent="0" marL="0">
-              <a:buNone/>
-            </a:pPr>
-            <a:r>
-              <a:rPr lang="en-US" sz="1400" dirty="0">
-                <a:solidFill>
-                  <a:schemeClr val="tx2"/>
-                </a:solidFill>
-              </a:rPr>
-              <a:t>Run SLSQP and the interior-point solver from 100 seeded starts; compare inventories and iterations.</a:t>
-            </a:r>
-            <a:endParaRPr lang="en-US" sz="1400" dirty="0"/>
-          </a:p>
-        </p:txBody>
-      </p:sp>
-      <p:sp>
-        <p:nvSpPr>
-          <p:cNvPr id="16" name="Number"/>
-          <p:cNvSpPr/>
-          <p:nvPr/>
-        </p:nvSpPr>
-        <p:spPr>
-          <a:xfrm>
-            <a:off x="5821528" y="2606040"/>
-            <a:ext cx="548640" cy="548640"/>
-          </a:xfrm>
-          <a:prstGeom prst="ellipse">
-            <a:avLst/>
-          </a:prstGeom>
-          <a:solidFill>
-            <a:schemeClr val="accent1"/>
-          </a:solidFill>
-          <a:ln w="6350">
-            <a:solidFill>
-              <a:schemeClr val="accent1"/>
-            </a:solidFill>
-            <a:prstDash val="solid"/>
-          </a:ln>
-        </p:spPr>
-      </p:sp>
-      <p:sp>
-        <p:nvSpPr>
-          <p:cNvPr id="17" name="Text 13"/>
-          <p:cNvSpPr txBox="1"/>
-          <p:nvPr/>
-        </p:nvSpPr>
-        <p:spPr>
-          <a:xfrm>
-            <a:off x="5821528" y="2606040"/>
-            <a:ext cx="548640" cy="548640"/>
-          </a:xfrm>
-          <a:prstGeom prst="rect">
-            <a:avLst/>
-          </a:prstGeom>
-          <a:noFill/>
-          <a:ln/>
-        </p:spPr>
-        <p:txBody>
-          <a:bodyPr wrap="square" lIns="0" tIns="0" rIns="0" bIns="0" rtlCol="0" anchor="ctr"/>
-          <a:lstStyle/>
-          <a:p>
-            <a:pPr algn="ctr" indent="0" marL="0">
-              <a:buNone/>
-            </a:pPr>
-            <a:r>
-              <a:rPr lang="en-US" sz="1600" b="1" dirty="0">
-                <a:solidFill>
-                  <a:schemeClr val="bg1"/>
-                </a:solidFill>
-                <a:latin typeface="Calibri" pitchFamily="34" charset="0"/>
-                <a:ea typeface="Calibri" pitchFamily="34" charset="-122"/>
-                <a:cs typeface="Calibri" pitchFamily="34" charset="-120"/>
-              </a:rPr>
-              <a:t>3</a:t>
-            </a:r>
-            <a:endParaRPr lang="en-US" sz="1600" dirty="0"/>
-          </a:p>
-        </p:txBody>
-      </p:sp>
-      <p:sp>
-        <p:nvSpPr>
-          <p:cNvPr id="18" name="Flow head"/>
-          <p:cNvSpPr txBox="1"/>
-          <p:nvPr/>
-        </p:nvSpPr>
-        <p:spPr>
-          <a:xfrm>
-            <a:off x="5059558" y="3291840"/>
-            <a:ext cx="2072579" cy="548640"/>
-          </a:xfrm>
-          <a:prstGeom prst="rect">
-            <a:avLst/>
-          </a:prstGeom>
-          <a:noFill/>
-          <a:ln/>
-        </p:spPr>
-        <p:txBody>
-          <a:bodyPr wrap="square" lIns="0" tIns="0" rIns="0" bIns="0" rtlCol="0" anchor="t"/>
-          <a:lstStyle/>
-          <a:p>
-            <a:pPr algn="ctr" indent="0" marL="0">
-              <a:buNone/>
-            </a:pPr>
-            <a:r>
-              <a:rPr lang="en-US" sz="1600" b="1" dirty="0">
-                <a:solidFill>
-                  <a:schemeClr val="tx1"/>
-                </a:solidFill>
-                <a:latin typeface="Cambria" pitchFamily="34" charset="0"/>
-                <a:ea typeface="Cambria" pitchFamily="34" charset="-122"/>
-                <a:cs typeface="Cambria" pitchFamily="34" charset="-120"/>
-              </a:rPr>
-              <a:t>Audit</a:t>
-            </a:r>
-            <a:endParaRPr lang="en-US" sz="1600" dirty="0"/>
-          </a:p>
-        </p:txBody>
-      </p:sp>
-      <p:sp>
-        <p:nvSpPr>
-          <p:cNvPr id="19" name="Flow text"/>
-          <p:cNvSpPr txBox="1"/>
-          <p:nvPr/>
-        </p:nvSpPr>
-        <p:spPr>
-          <a:xfrm>
-            <a:off x="5077846" y="3867912"/>
-            <a:ext cx="2036003" cy="1554480"/>
-          </a:xfrm>
-          <a:prstGeom prst="rect">
-            <a:avLst/>
-          </a:prstGeom>
-          <a:noFill/>
-          <a:ln/>
-        </p:spPr>
-        <p:txBody>
-          <a:bodyPr wrap="square" lIns="0" tIns="0" rIns="0" bIns="0" rtlCol="0" anchor="t"/>
-          <a:lstStyle/>
-          <a:p>
-            <a:pPr algn="ctr" indent="0" marL="0">
-              <a:buNone/>
-            </a:pPr>
-            <a:r>
-              <a:rPr lang="en-US" sz="1400" dirty="0">
-                <a:solidFill>
-                  <a:schemeClr val="tx2"/>
-                </a:solidFill>
-              </a:rPr>
-              <a:t>Verify the KKT conditions at each answer and the saddle: residuals, LICQ, the reduced Hessian.</a:t>
-            </a:r>
-            <a:endParaRPr lang="en-US" sz="1400" dirty="0"/>
-          </a:p>
-        </p:txBody>
-      </p:sp>
-      <p:sp>
-        <p:nvSpPr>
-          <p:cNvPr id="20" name="Number"/>
-          <p:cNvSpPr/>
-          <p:nvPr/>
-        </p:nvSpPr>
-        <p:spPr>
-          <a:xfrm>
-            <a:off x="8040411" y="2606040"/>
-            <a:ext cx="548640" cy="548640"/>
-          </a:xfrm>
-          <a:prstGeom prst="ellipse">
-            <a:avLst/>
-          </a:prstGeom>
-          <a:solidFill>
-            <a:schemeClr val="accent1"/>
-          </a:solidFill>
-          <a:ln w="6350">
-            <a:solidFill>
-              <a:schemeClr val="accent1"/>
-            </a:solidFill>
-            <a:prstDash val="solid"/>
-          </a:ln>
-        </p:spPr>
-      </p:sp>
-      <p:sp>
-        <p:nvSpPr>
-          <p:cNvPr id="21" name="Text 17"/>
-          <p:cNvSpPr txBox="1"/>
-          <p:nvPr/>
-        </p:nvSpPr>
-        <p:spPr>
-          <a:xfrm>
-            <a:off x="8040411" y="2606040"/>
-            <a:ext cx="548640" cy="548640"/>
-          </a:xfrm>
-          <a:prstGeom prst="rect">
-            <a:avLst/>
-          </a:prstGeom>
-          <a:noFill/>
-          <a:ln/>
-        </p:spPr>
-        <p:txBody>
-          <a:bodyPr wrap="square" lIns="0" tIns="0" rIns="0" bIns="0" rtlCol="0" anchor="ctr"/>
-          <a:lstStyle/>
-          <a:p>
-            <a:pPr algn="ctr" indent="0" marL="0">
-              <a:buNone/>
-            </a:pPr>
-            <a:r>
-              <a:rPr lang="en-US" sz="1600" b="1" dirty="0">
-                <a:solidFill>
-                  <a:schemeClr val="bg1"/>
-                </a:solidFill>
-                <a:latin typeface="Calibri" pitchFamily="34" charset="0"/>
-                <a:ea typeface="Calibri" pitchFamily="34" charset="-122"/>
-                <a:cs typeface="Calibri" pitchFamily="34" charset="-120"/>
-              </a:rPr>
-              <a:t>4</a:t>
-            </a:r>
-            <a:endParaRPr lang="en-US" sz="1600" dirty="0"/>
-          </a:p>
-        </p:txBody>
-      </p:sp>
-      <p:sp>
-        <p:nvSpPr>
-          <p:cNvPr id="22" name="Flow head"/>
-          <p:cNvSpPr txBox="1"/>
-          <p:nvPr/>
-        </p:nvSpPr>
-        <p:spPr>
-          <a:xfrm>
-            <a:off x="7278441" y="3291840"/>
-            <a:ext cx="2072579" cy="548640"/>
-          </a:xfrm>
-          <a:prstGeom prst="rect">
-            <a:avLst/>
-          </a:prstGeom>
-          <a:noFill/>
-          <a:ln/>
-        </p:spPr>
-        <p:txBody>
-          <a:bodyPr wrap="square" lIns="0" tIns="0" rIns="0" bIns="0" rtlCol="0" anchor="t"/>
-          <a:lstStyle/>
-          <a:p>
-            <a:pPr algn="ctr" indent="0" marL="0">
-              <a:buNone/>
-            </a:pPr>
-            <a:r>
-              <a:rPr lang="en-US" sz="1600" b="1" dirty="0">
-                <a:solidFill>
-                  <a:schemeClr val="tx1"/>
-                </a:solidFill>
-                <a:latin typeface="Cambria" pitchFamily="34" charset="0"/>
-                <a:ea typeface="Cambria" pitchFamily="34" charset="-122"/>
-                <a:cs typeface="Cambria" pitchFamily="34" charset="-120"/>
-              </a:rPr>
-              <a:t>Bound</a:t>
-            </a:r>
-            <a:endParaRPr lang="en-US" sz="1600" dirty="0"/>
-          </a:p>
-        </p:txBody>
-      </p:sp>
-      <p:sp>
-        <p:nvSpPr>
-          <p:cNvPr id="23" name="Flow text"/>
-          <p:cNvSpPr txBox="1"/>
-          <p:nvPr/>
-        </p:nvSpPr>
-        <p:spPr>
-          <a:xfrm>
-            <a:off x="7296729" y="3867912"/>
-            <a:ext cx="2036003" cy="1554480"/>
-          </a:xfrm>
-          <a:prstGeom prst="rect">
-            <a:avLst/>
-          </a:prstGeom>
-          <a:noFill/>
-          <a:ln/>
-        </p:spPr>
-        <p:txBody>
-          <a:bodyPr wrap="square" lIns="0" tIns="0" rIns="0" bIns="0" rtlCol="0" anchor="t"/>
-          <a:lstStyle/>
-          <a:p>
-            <a:pPr algn="ctr" indent="0" marL="0">
-              <a:buNone/>
-            </a:pPr>
-            <a:r>
-              <a:rPr lang="en-US" sz="1400" dirty="0">
-                <a:solidFill>
-                  <a:schemeClr val="tx2"/>
-                </a:solidFill>
-              </a:rPr>
-              <a:t>Solve Lab 2.3's relaxation and compute each answer's distance from the ceiling.</a:t>
-            </a:r>
-            <a:endParaRPr lang="en-US" sz="1400" dirty="0"/>
-          </a:p>
-        </p:txBody>
-      </p:sp>
-      <p:sp>
-        <p:nvSpPr>
-          <p:cNvPr id="24" name="Number"/>
-          <p:cNvSpPr/>
-          <p:nvPr/>
-        </p:nvSpPr>
-        <p:spPr>
-          <a:xfrm>
-            <a:off x="10259294" y="2606040"/>
-            <a:ext cx="548640" cy="548640"/>
-          </a:xfrm>
-          <a:prstGeom prst="ellipse">
-            <a:avLst/>
-          </a:prstGeom>
-          <a:solidFill>
-            <a:schemeClr val="accent1"/>
-          </a:solidFill>
-          <a:ln w="6350">
-            <a:solidFill>
-              <a:schemeClr val="accent1"/>
-            </a:solidFill>
-            <a:prstDash val="solid"/>
-          </a:ln>
-        </p:spPr>
-      </p:sp>
-      <p:sp>
-        <p:nvSpPr>
-          <p:cNvPr id="25" name="Text 21"/>
-          <p:cNvSpPr txBox="1"/>
-          <p:nvPr/>
-        </p:nvSpPr>
-        <p:spPr>
-          <a:xfrm>
-            <a:off x="10259294" y="2606040"/>
-            <a:ext cx="548640" cy="548640"/>
-          </a:xfrm>
-          <a:prstGeom prst="rect">
-            <a:avLst/>
-          </a:prstGeom>
-          <a:noFill/>
-          <a:ln/>
-        </p:spPr>
-        <p:txBody>
-          <a:bodyPr wrap="square" lIns="0" tIns="0" rIns="0" bIns="0" rtlCol="0" anchor="ctr"/>
-          <a:lstStyle/>
-          <a:p>
-            <a:pPr algn="ctr" indent="0" marL="0">
-              <a:buNone/>
-            </a:pPr>
-            <a:r>
-              <a:rPr lang="en-US" sz="1600" b="1" dirty="0">
-                <a:solidFill>
-                  <a:schemeClr val="bg1"/>
-                </a:solidFill>
-                <a:latin typeface="Calibri" pitchFamily="34" charset="0"/>
-                <a:ea typeface="Calibri" pitchFamily="34" charset="-122"/>
-                <a:cs typeface="Calibri" pitchFamily="34" charset="-120"/>
-              </a:rPr>
-              <a:t>5</a:t>
-            </a:r>
-            <a:endParaRPr lang="en-US" sz="1600" dirty="0"/>
-          </a:p>
-        </p:txBody>
-      </p:sp>
-      <p:sp>
-        <p:nvSpPr>
-          <p:cNvPr id="26" name="Flow head"/>
-          <p:cNvSpPr txBox="1"/>
-          <p:nvPr/>
-        </p:nvSpPr>
-        <p:spPr>
-          <a:xfrm>
-            <a:off x="9497324" y="3291840"/>
-            <a:ext cx="2072579" cy="548640"/>
-          </a:xfrm>
-          <a:prstGeom prst="rect">
-            <a:avLst/>
-          </a:prstGeom>
-          <a:noFill/>
-          <a:ln/>
-        </p:spPr>
-        <p:txBody>
-          <a:bodyPr wrap="square" lIns="0" tIns="0" rIns="0" bIns="0" rtlCol="0" anchor="t"/>
-          <a:lstStyle/>
-          <a:p>
-            <a:pPr algn="ctr" indent="0" marL="0">
-              <a:buNone/>
-            </a:pPr>
-            <a:r>
-              <a:rPr lang="en-US" sz="1600" b="1" dirty="0">
-                <a:solidFill>
-                  <a:schemeClr val="tx1"/>
-                </a:solidFill>
-                <a:latin typeface="Cambria" pitchFamily="34" charset="0"/>
-                <a:ea typeface="Cambria" pitchFamily="34" charset="-122"/>
-                <a:cs typeface="Cambria" pitchFamily="34" charset="-120"/>
-              </a:rPr>
-              <a:t>Branch</a:t>
-            </a:r>
-            <a:endParaRPr lang="en-US" sz="1600" dirty="0"/>
-          </a:p>
-        </p:txBody>
-      </p:sp>
-      <p:sp>
-        <p:nvSpPr>
-          <p:cNvPr id="27" name="Flow text"/>
-          <p:cNvSpPr txBox="1"/>
-          <p:nvPr/>
-        </p:nvSpPr>
-        <p:spPr>
-          <a:xfrm>
-            <a:off x="9515612" y="3867912"/>
-            <a:ext cx="2036003" cy="1554480"/>
-          </a:xfrm>
-          <a:prstGeom prst="rect">
-            <a:avLst/>
-          </a:prstGeom>
-          <a:noFill/>
-          <a:ln/>
-        </p:spPr>
-        <p:txBody>
-          <a:bodyPr wrap="square" lIns="0" tIns="0" rIns="0" bIns="0" rtlCol="0" anchor="t"/>
-          <a:lstStyle/>
-          <a:p>
-            <a:pPr algn="ctr" indent="0" marL="0">
-              <a:buNone/>
-            </a:pPr>
-            <a:r>
-              <a:rPr lang="en-US" sz="1400" dirty="0">
-                <a:solidFill>
-                  <a:schemeClr val="tx2"/>
-                </a:solidFill>
-              </a:rPr>
-              <a:t>Fix the year-5 round at none and at whole, re-solve, and continue until every node settles.</a:t>
-            </a:r>
-            <a:endParaRPr lang="en-US" sz="1400" dirty="0"/>
-          </a:p>
-        </p:txBody>
-      </p:sp>
-      <p:sp>
-        <p:nvSpPr>
-          <p:cNvPr id="28" name="Deliverable card"/>
-          <p:cNvSpPr/>
-          <p:nvPr/>
-        </p:nvSpPr>
-        <p:spPr>
-          <a:xfrm>
-            <a:off x="548640" y="5486400"/>
-            <a:ext cx="11094415" cy="685800"/>
+            <a:off x="548640" y="1691640"/>
+            <a:ext cx="3515258" cy="2103120"/>
           </a:xfrm>
           <a:prstGeom prst="roundRect">
             <a:avLst>
-              <a:gd name="adj" fmla="val 10667"/>
+              <a:gd name="adj" fmla="val 3478"/>
             </a:avLst>
           </a:prstGeom>
           <a:solidFill>
@@ -16788,14 +16104,14 @@
       </p:sp>
       <p:sp>
         <p:nvSpPr>
-          <p:cNvPr id="29" name="Deliverable"/>
+          <p:cNvPr id="6" name="Card label"/>
           <p:cNvSpPr txBox="1"/>
           <p:nvPr/>
         </p:nvSpPr>
         <p:spPr>
           <a:xfrm>
-            <a:off x="777240" y="5559552"/>
-            <a:ext cx="10637215" cy="539496"/>
+            <a:off x="731520" y="1819656"/>
+            <a:ext cx="3149498" cy="310896"/>
           </a:xfrm>
           <a:prstGeom prst="rect">
             <a:avLst/>
@@ -16811,22 +16127,779 @@
               <a:buNone/>
             </a:pPr>
             <a:r>
-              <a:rPr lang="en-US" sz="1400" b="1" dirty="0">
+              <a:rPr lang="en-US" sz="1300" b="1" dirty="0">
+                <a:solidFill>
+                  <a:schemeClr val="accent1"/>
+                </a:solidFill>
+              </a:rPr>
+              <a:t>The decision</a:t>
+            </a:r>
+            <a:endParaRPr lang="en-US" sz="1300" dirty="0"/>
+          </a:p>
+        </p:txBody>
+      </p:sp>
+      <p:sp>
+        <p:nvSpPr>
+          <p:cNvPr id="7" name="Card head"/>
+          <p:cNvSpPr txBox="1"/>
+          <p:nvPr/>
+        </p:nvSpPr>
+        <p:spPr>
+          <a:xfrm>
+            <a:off x="731520" y="2148840"/>
+            <a:ext cx="3149498" cy="576072"/>
+          </a:xfrm>
+          <a:prstGeom prst="rect">
+            <a:avLst/>
+          </a:prstGeom>
+          <a:noFill/>
+          <a:ln/>
+        </p:spPr>
+        <p:txBody>
+          <a:bodyPr wrap="square" lIns="0" tIns="0" rIns="0" bIns="0" rtlCol="0" anchor="t"/>
+          <a:lstStyle/>
+          <a:p>
+            <a:pPr indent="0" marL="0">
+              <a:buNone/>
+            </a:pPr>
+            <a:r>
+              <a:rPr lang="en-US" sz="1600" b="1" dirty="0">
                 <a:solidFill>
                   <a:schemeClr val="tx1"/>
                 </a:solidFill>
-              </a:rPr>
-              <a:t>Deliverable:</a:t>
-            </a:r>
-            <a:r>
-              <a:rPr lang="en-US" sz="1400" dirty="0">
+                <a:latin typeface="Cambria" pitchFamily="34" charset="0"/>
+                <a:ea typeface="Cambria" pitchFamily="34" charset="-122"/>
+                <a:cs typeface="Cambria" pitchFamily="34" charset="-120"/>
+              </a:rPr>
+              <a:t>272 games in 576 windows</a:t>
+            </a:r>
+            <a:endParaRPr lang="en-US" sz="1600" dirty="0"/>
+          </a:p>
+        </p:txBody>
+      </p:sp>
+      <p:sp>
+        <p:nvSpPr>
+          <p:cNvPr id="8" name="Card text"/>
+          <p:cNvSpPr txBox="1"/>
+          <p:nvPr/>
+        </p:nvSpPr>
+        <p:spPr>
+          <a:xfrm>
+            <a:off x="731520" y="2798064"/>
+            <a:ext cx="3149498" cy="868680"/>
+          </a:xfrm>
+          <a:prstGeom prst="rect">
+            <a:avLst/>
+          </a:prstGeom>
+          <a:noFill/>
+          <a:ln/>
+        </p:spPr>
+        <p:txBody>
+          <a:bodyPr wrap="square" lIns="0" tIns="0" rIns="0" bIns="0" rtlCol="0" anchor="t"/>
+          <a:lstStyle/>
+          <a:p>
+            <a:pPr indent="0" marL="0">
+              <a:buNone/>
+            </a:pPr>
+            <a:r>
+              <a:rPr lang="en-US" sz="1300" dirty="0">
+                <a:solidFill>
+                  <a:schemeClr val="tx2"/>
+                </a:solidFill>
+              </a:rPr>
+              <a:t>A week, a day and time, and a network for every game, under more than 20,000 rules.</a:t>
+            </a:r>
+            <a:endParaRPr lang="en-US" sz="1300" dirty="0"/>
+          </a:p>
+        </p:txBody>
+      </p:sp>
+      <p:sp>
+        <p:nvSpPr>
+          <p:cNvPr id="9" name="Card"/>
+          <p:cNvSpPr/>
+          <p:nvPr/>
+        </p:nvSpPr>
+        <p:spPr>
+          <a:xfrm>
+            <a:off x="4338218" y="1691640"/>
+            <a:ext cx="3515258" cy="2103120"/>
+          </a:xfrm>
+          <a:prstGeom prst="roundRect">
+            <a:avLst>
+              <a:gd name="adj" fmla="val 3478"/>
+            </a:avLst>
+          </a:prstGeom>
+          <a:solidFill>
+            <a:schemeClr val="bg2"/>
+          </a:solidFill>
+          <a:ln w="9525">
+            <a:solidFill>
+              <a:srgbClr val="C4CBD8"/>
+            </a:solidFill>
+            <a:prstDash val="solid"/>
+          </a:ln>
+        </p:spPr>
+      </p:sp>
+      <p:sp>
+        <p:nvSpPr>
+          <p:cNvPr id="10" name="Card label"/>
+          <p:cNvSpPr txBox="1"/>
+          <p:nvPr/>
+        </p:nvSpPr>
+        <p:spPr>
+          <a:xfrm>
+            <a:off x="4521098" y="1819656"/>
+            <a:ext cx="3149498" cy="310896"/>
+          </a:xfrm>
+          <a:prstGeom prst="rect">
+            <a:avLst/>
+          </a:prstGeom>
+          <a:noFill/>
+          <a:ln/>
+        </p:spPr>
+        <p:txBody>
+          <a:bodyPr wrap="square" lIns="0" tIns="0" rIns="0" bIns="0" rtlCol="0" anchor="ctr"/>
+          <a:lstStyle/>
+          <a:p>
+            <a:pPr indent="0" marL="0">
+              <a:buNone/>
+            </a:pPr>
+            <a:r>
+              <a:rPr lang="en-US" sz="1300" b="1" dirty="0">
+                <a:solidFill>
+                  <a:schemeClr val="accent1"/>
+                </a:solidFill>
+              </a:rPr>
+              <a:t>The method</a:t>
+            </a:r>
+            <a:endParaRPr lang="en-US" sz="1300" dirty="0"/>
+          </a:p>
+        </p:txBody>
+      </p:sp>
+      <p:sp>
+        <p:nvSpPr>
+          <p:cNvPr id="11" name="Card head"/>
+          <p:cNvSpPr txBox="1"/>
+          <p:nvPr/>
+        </p:nvSpPr>
+        <p:spPr>
+          <a:xfrm>
+            <a:off x="4521098" y="2148840"/>
+            <a:ext cx="3149498" cy="576072"/>
+          </a:xfrm>
+          <a:prstGeom prst="rect">
+            <a:avLst/>
+          </a:prstGeom>
+          <a:noFill/>
+          <a:ln/>
+        </p:spPr>
+        <p:txBody>
+          <a:bodyPr wrap="square" lIns="0" tIns="0" rIns="0" bIns="0" rtlCol="0" anchor="t"/>
+          <a:lstStyle/>
+          <a:p>
+            <a:pPr indent="0" marL="0">
+              <a:buNone/>
+            </a:pPr>
+            <a:r>
+              <a:rPr lang="en-US" sz="1600" b="1" dirty="0">
                 <a:solidFill>
                   <a:schemeClr val="tx1"/>
                 </a:solidFill>
-              </a:rPr>
-              <a:t> a one-page note to the board: the inventory of local answers with their audits, the ceiling and each answer's distance from it, the branch-and-bound certificate, and a recommendation on partial automation. About 75 minutes.</a:t>
-            </a:r>
-            <a:endParaRPr lang="en-US" sz="1400" dirty="0"/>
+                <a:latin typeface="Cambria" pitchFamily="34" charset="0"/>
+                <a:ea typeface="Cambria" pitchFamily="34" charset="-122"/>
+                <a:cs typeface="Cambria" pitchFamily="34" charset="-120"/>
+              </a:rPr>
+              <a:t>Fix 50–80 games, complete the rest</a:t>
+            </a:r>
+            <a:endParaRPr lang="en-US" sz="1600" dirty="0"/>
+          </a:p>
+        </p:txBody>
+      </p:sp>
+      <p:sp>
+        <p:nvSpPr>
+          <p:cNvPr id="12" name="Card text"/>
+          <p:cNvSpPr txBox="1"/>
+          <p:nvPr/>
+        </p:nvSpPr>
+        <p:spPr>
+          <a:xfrm>
+            <a:off x="4521098" y="2798064"/>
+            <a:ext cx="3149498" cy="868680"/>
+          </a:xfrm>
+          <a:prstGeom prst="rect">
+            <a:avLst/>
+          </a:prstGeom>
+          <a:noFill/>
+          <a:ln/>
+        </p:spPr>
+        <p:txBody>
+          <a:bodyPr wrap="square" lIns="0" tIns="0" rIns="0" bIns="0" rtlCol="0" anchor="t"/>
+          <a:lstStyle/>
+          <a:p>
+            <a:pPr indent="0" marL="0">
+              <a:buNone/>
+            </a:pPr>
+            <a:r>
+              <a:rPr lang="en-US" sz="1300" dirty="0">
+                <a:solidFill>
+                  <a:schemeClr val="tx2"/>
+                </a:solidFill>
+              </a:rPr>
+              <a:t>Thousands of seeded trials, each completed by a mixed-integer solver overnight, on thousands of machines.</a:t>
+            </a:r>
+            <a:endParaRPr lang="en-US" sz="1300" dirty="0"/>
+          </a:p>
+        </p:txBody>
+      </p:sp>
+      <p:sp>
+        <p:nvSpPr>
+          <p:cNvPr id="13" name="Card"/>
+          <p:cNvSpPr/>
+          <p:nvPr/>
+        </p:nvSpPr>
+        <p:spPr>
+          <a:xfrm>
+            <a:off x="8127797" y="1691640"/>
+            <a:ext cx="3515258" cy="2103120"/>
+          </a:xfrm>
+          <a:prstGeom prst="roundRect">
+            <a:avLst>
+              <a:gd name="adj" fmla="val 3478"/>
+            </a:avLst>
+          </a:prstGeom>
+          <a:solidFill>
+            <a:schemeClr val="tx1"/>
+          </a:solidFill>
+          <a:ln w="9525">
+            <a:solidFill>
+              <a:srgbClr val="0F1E3D"/>
+            </a:solidFill>
+            <a:prstDash val="solid"/>
+          </a:ln>
+        </p:spPr>
+      </p:sp>
+      <p:sp>
+        <p:nvSpPr>
+          <p:cNvPr id="14" name="Card label"/>
+          <p:cNvSpPr txBox="1"/>
+          <p:nvPr/>
+        </p:nvSpPr>
+        <p:spPr>
+          <a:xfrm>
+            <a:off x="8310677" y="1819656"/>
+            <a:ext cx="3149498" cy="310896"/>
+          </a:xfrm>
+          <a:prstGeom prst="rect">
+            <a:avLst/>
+          </a:prstGeom>
+          <a:noFill/>
+          <a:ln/>
+        </p:spPr>
+        <p:txBody>
+          <a:bodyPr wrap="square" lIns="0" tIns="0" rIns="0" bIns="0" rtlCol="0" anchor="ctr"/>
+          <a:lstStyle/>
+          <a:p>
+            <a:pPr indent="0" marL="0">
+              <a:buNone/>
+            </a:pPr>
+            <a:r>
+              <a:rPr lang="en-US" sz="1300" b="1" dirty="0">
+                <a:solidFill>
+                  <a:schemeClr val="accent1"/>
+                </a:solidFill>
+              </a:rPr>
+              <a:t>The result</a:t>
+            </a:r>
+            <a:endParaRPr lang="en-US" sz="1300" dirty="0"/>
+          </a:p>
+        </p:txBody>
+      </p:sp>
+      <p:sp>
+        <p:nvSpPr>
+          <p:cNvPr id="15" name="Card head"/>
+          <p:cNvSpPr txBox="1"/>
+          <p:nvPr/>
+        </p:nvSpPr>
+        <p:spPr>
+          <a:xfrm>
+            <a:off x="8310677" y="2148840"/>
+            <a:ext cx="3149498" cy="576072"/>
+          </a:xfrm>
+          <a:prstGeom prst="rect">
+            <a:avLst/>
+          </a:prstGeom>
+          <a:noFill/>
+          <a:ln/>
+        </p:spPr>
+        <p:txBody>
+          <a:bodyPr wrap="square" lIns="0" tIns="0" rIns="0" bIns="0" rtlCol="0" anchor="t"/>
+          <a:lstStyle/>
+          <a:p>
+            <a:pPr indent="0" marL="0">
+              <a:buNone/>
+            </a:pPr>
+            <a:r>
+              <a:rPr lang="en-US" sz="1600" b="1" dirty="0">
+                <a:solidFill>
+                  <a:schemeClr val="bg1"/>
+                </a:solidFill>
+                <a:latin typeface="Cambria" pitchFamily="34" charset="0"/>
+                <a:ea typeface="Cambria" pitchFamily="34" charset="-122"/>
+                <a:cs typeface="Cambria" pitchFamily="34" charset="-120"/>
+              </a:rPr>
+              <a:t>80,000-plus schedules for 2021</a:t>
+            </a:r>
+            <a:endParaRPr lang="en-US" sz="1600" dirty="0"/>
+          </a:p>
+        </p:txBody>
+      </p:sp>
+      <p:sp>
+        <p:nvSpPr>
+          <p:cNvPr id="16" name="Card text"/>
+          <p:cNvSpPr txBox="1"/>
+          <p:nvPr/>
+        </p:nvSpPr>
+        <p:spPr>
+          <a:xfrm>
+            <a:off x="8310677" y="2798064"/>
+            <a:ext cx="3149498" cy="868680"/>
+          </a:xfrm>
+          <a:prstGeom prst="rect">
+            <a:avLst/>
+          </a:prstGeom>
+          <a:noFill/>
+          <a:ln/>
+        </p:spPr>
+        <p:txBody>
+          <a:bodyPr wrap="square" lIns="0" tIns="0" rIns="0" bIns="0" rtlCol="0" anchor="t"/>
+          <a:lstStyle/>
+          <a:p>
+            <a:pPr indent="0" marL="0">
+              <a:buNone/>
+            </a:pPr>
+            <a:r>
+              <a:rPr lang="en-US" sz="1300" dirty="0">
+                <a:solidFill>
+                  <a:schemeClr val="bg2"/>
+                </a:solidFill>
+              </a:rPr>
+              <a:t>Thousands of human hours and about $2m saved, by Amazon's estimate; no published measure of viewers gained.</a:t>
+            </a:r>
+            <a:endParaRPr lang="en-US" sz="1300" dirty="0"/>
+          </a:p>
+        </p:txBody>
+      </p:sp>
+      <p:sp>
+        <p:nvSpPr>
+          <p:cNvPr id="17" name="Card"/>
+          <p:cNvSpPr/>
+          <p:nvPr/>
+        </p:nvSpPr>
+        <p:spPr>
+          <a:xfrm>
+            <a:off x="548640" y="4069080"/>
+            <a:ext cx="3515258" cy="2103120"/>
+          </a:xfrm>
+          <a:prstGeom prst="roundRect">
+            <a:avLst>
+              <a:gd name="adj" fmla="val 3478"/>
+            </a:avLst>
+          </a:prstGeom>
+          <a:solidFill>
+            <a:schemeClr val="bg2"/>
+          </a:solidFill>
+          <a:ln w="9525">
+            <a:solidFill>
+              <a:srgbClr val="C4CBD8"/>
+            </a:solidFill>
+            <a:prstDash val="solid"/>
+          </a:ln>
+        </p:spPr>
+      </p:sp>
+      <p:sp>
+        <p:nvSpPr>
+          <p:cNvPr id="18" name="Card label"/>
+          <p:cNvSpPr txBox="1"/>
+          <p:nvPr/>
+        </p:nvSpPr>
+        <p:spPr>
+          <a:xfrm>
+            <a:off x="731520" y="4197096"/>
+            <a:ext cx="3149498" cy="310896"/>
+          </a:xfrm>
+          <a:prstGeom prst="rect">
+            <a:avLst/>
+          </a:prstGeom>
+          <a:noFill/>
+          <a:ln/>
+        </p:spPr>
+        <p:txBody>
+          <a:bodyPr wrap="square" lIns="0" tIns="0" rIns="0" bIns="0" rtlCol="0" anchor="ctr"/>
+          <a:lstStyle/>
+          <a:p>
+            <a:pPr indent="0" marL="0">
+              <a:buNone/>
+            </a:pPr>
+            <a:r>
+              <a:rPr lang="en-US" sz="1300" b="1" dirty="0">
+                <a:solidFill>
+                  <a:schemeClr val="accent1"/>
+                </a:solidFill>
+              </a:rPr>
+              <a:t>Making it work</a:t>
+            </a:r>
+            <a:endParaRPr lang="en-US" sz="1300" dirty="0"/>
+          </a:p>
+        </p:txBody>
+      </p:sp>
+      <p:sp>
+        <p:nvSpPr>
+          <p:cNvPr id="19" name="Card head"/>
+          <p:cNvSpPr txBox="1"/>
+          <p:nvPr/>
+        </p:nvSpPr>
+        <p:spPr>
+          <a:xfrm>
+            <a:off x="731520" y="4526280"/>
+            <a:ext cx="3149498" cy="576072"/>
+          </a:xfrm>
+          <a:prstGeom prst="rect">
+            <a:avLst/>
+          </a:prstGeom>
+          <a:noFill/>
+          <a:ln/>
+        </p:spPr>
+        <p:txBody>
+          <a:bodyPr wrap="square" lIns="0" tIns="0" rIns="0" bIns="0" rtlCol="0" anchor="t"/>
+          <a:lstStyle/>
+          <a:p>
+            <a:pPr indent="0" marL="0">
+              <a:buNone/>
+            </a:pPr>
+            <a:r>
+              <a:rPr lang="en-US" sz="1600" b="1" dirty="0">
+                <a:solidFill>
+                  <a:schemeClr val="tx1"/>
+                </a:solidFill>
+                <a:latin typeface="Cambria" pitchFamily="34" charset="0"/>
+                <a:ea typeface="Cambria" pitchFamily="34" charset="-122"/>
+                <a:cs typeface="Cambria" pitchFamily="34" charset="-120"/>
+              </a:rPr>
+              <a:t>People choose the schedule</a:t>
+            </a:r>
+            <a:endParaRPr lang="en-US" sz="1600" dirty="0"/>
+          </a:p>
+        </p:txBody>
+      </p:sp>
+      <p:sp>
+        <p:nvSpPr>
+          <p:cNvPr id="20" name="Card text"/>
+          <p:cNvSpPr txBox="1"/>
+          <p:nvPr/>
+        </p:nvSpPr>
+        <p:spPr>
+          <a:xfrm>
+            <a:off x="731520" y="5175504"/>
+            <a:ext cx="3149498" cy="868680"/>
+          </a:xfrm>
+          <a:prstGeom prst="rect">
+            <a:avLst/>
+          </a:prstGeom>
+          <a:noFill/>
+          <a:ln/>
+        </p:spPr>
+        <p:txBody>
+          <a:bodyPr wrap="square" lIns="0" tIns="0" rIns="0" bIns="0" rtlCol="0" anchor="t"/>
+          <a:lstStyle/>
+          <a:p>
+            <a:pPr indent="0" marL="0">
+              <a:buNone/>
+            </a:pPr>
+            <a:r>
+              <a:rPr lang="en-US" sz="1300" dirty="0">
+                <a:solidFill>
+                  <a:schemeClr val="tx2"/>
+                </a:solidFill>
+              </a:rPr>
+              <a:t>Computers produce candidates; the schedule makers weigh what no rule settles, knowing no schedule is perfect.</a:t>
+            </a:r>
+            <a:endParaRPr lang="en-US" sz="1300" dirty="0"/>
+          </a:p>
+        </p:txBody>
+      </p:sp>
+      <p:sp>
+        <p:nvSpPr>
+          <p:cNvPr id="21" name="Card"/>
+          <p:cNvSpPr/>
+          <p:nvPr/>
+        </p:nvSpPr>
+        <p:spPr>
+          <a:xfrm>
+            <a:off x="4338218" y="4069080"/>
+            <a:ext cx="3515258" cy="2103120"/>
+          </a:xfrm>
+          <a:prstGeom prst="roundRect">
+            <a:avLst>
+              <a:gd name="adj" fmla="val 3478"/>
+            </a:avLst>
+          </a:prstGeom>
+          <a:solidFill>
+            <a:schemeClr val="bg2"/>
+          </a:solidFill>
+          <a:ln w="9525">
+            <a:solidFill>
+              <a:srgbClr val="C4CBD8"/>
+            </a:solidFill>
+            <a:prstDash val="solid"/>
+          </a:ln>
+        </p:spPr>
+      </p:sp>
+      <p:sp>
+        <p:nvSpPr>
+          <p:cNvPr id="22" name="Card label"/>
+          <p:cNvSpPr txBox="1"/>
+          <p:nvPr/>
+        </p:nvSpPr>
+        <p:spPr>
+          <a:xfrm>
+            <a:off x="4521098" y="4197096"/>
+            <a:ext cx="3149498" cy="310896"/>
+          </a:xfrm>
+          <a:prstGeom prst="rect">
+            <a:avLst/>
+          </a:prstGeom>
+          <a:noFill/>
+          <a:ln/>
+        </p:spPr>
+        <p:txBody>
+          <a:bodyPr wrap="square" lIns="0" tIns="0" rIns="0" bIns="0" rtlCol="0" anchor="ctr"/>
+          <a:lstStyle/>
+          <a:p>
+            <a:pPr indent="0" marL="0">
+              <a:buNone/>
+            </a:pPr>
+            <a:r>
+              <a:rPr lang="en-US" sz="1300" b="1" dirty="0">
+                <a:solidFill>
+                  <a:schemeClr val="accent1"/>
+                </a:solidFill>
+              </a:rPr>
+              <a:t>What Meridian takes</a:t>
+            </a:r>
+            <a:endParaRPr lang="en-US" sz="1300" dirty="0"/>
+          </a:p>
+        </p:txBody>
+      </p:sp>
+      <p:sp>
+        <p:nvSpPr>
+          <p:cNvPr id="23" name="Card head"/>
+          <p:cNvSpPr txBox="1"/>
+          <p:nvPr/>
+        </p:nvSpPr>
+        <p:spPr>
+          <a:xfrm>
+            <a:off x="4521098" y="4526280"/>
+            <a:ext cx="3149498" cy="576072"/>
+          </a:xfrm>
+          <a:prstGeom prst="rect">
+            <a:avLst/>
+          </a:prstGeom>
+          <a:noFill/>
+          <a:ln/>
+        </p:spPr>
+        <p:txBody>
+          <a:bodyPr wrap="square" lIns="0" tIns="0" rIns="0" bIns="0" rtlCol="0" anchor="t"/>
+          <a:lstStyle/>
+          <a:p>
+            <a:pPr indent="0" marL="0">
+              <a:buNone/>
+            </a:pPr>
+            <a:r>
+              <a:rPr lang="en-US" sz="1600" b="1" dirty="0">
+                <a:solidFill>
+                  <a:schemeClr val="tx1"/>
+                </a:solidFill>
+                <a:latin typeface="Cambria" pitchFamily="34" charset="0"/>
+                <a:ea typeface="Cambria" pitchFamily="34" charset="-122"/>
+                <a:cs typeface="Cambria" pitchFamily="34" charset="-120"/>
+              </a:rPr>
+              <a:t>Gap or no gap</a:t>
+            </a:r>
+            <a:endParaRPr lang="en-US" sz="1600" dirty="0"/>
+          </a:p>
+        </p:txBody>
+      </p:sp>
+      <p:sp>
+        <p:nvSpPr>
+          <p:cNvPr id="24" name="Card text"/>
+          <p:cNvSpPr txBox="1"/>
+          <p:nvPr/>
+        </p:nvSpPr>
+        <p:spPr>
+          <a:xfrm>
+            <a:off x="4521098" y="5175504"/>
+            <a:ext cx="3149498" cy="868680"/>
+          </a:xfrm>
+          <a:prstGeom prst="rect">
+            <a:avLst/>
+          </a:prstGeom>
+          <a:noFill/>
+          <a:ln/>
+        </p:spPr>
+        <p:txBody>
+          <a:bodyPr wrap="square" lIns="0" tIns="0" rIns="0" bIns="0" rtlCol="0" anchor="t"/>
+          <a:lstStyle/>
+          <a:p>
+            <a:pPr indent="0" marL="0">
+              <a:buNone/>
+            </a:pPr>
+            <a:r>
+              <a:rPr lang="en-US" sz="1300" dirty="0">
+                <a:solidFill>
+                  <a:schemeClr val="tx2"/>
+                </a:solidFill>
+              </a:rPr>
+              <a:t>Worked Example 4.1 closed its gap; a seeded search keeps no ceiling. Know which of the two you are buying.</a:t>
+            </a:r>
+            <a:endParaRPr lang="en-US" sz="1300" dirty="0"/>
+          </a:p>
+        </p:txBody>
+      </p:sp>
+      <p:sp>
+        <p:nvSpPr>
+          <p:cNvPr id="25" name="Card"/>
+          <p:cNvSpPr/>
+          <p:nvPr/>
+        </p:nvSpPr>
+        <p:spPr>
+          <a:xfrm>
+            <a:off x="8127797" y="4069080"/>
+            <a:ext cx="3515258" cy="2103120"/>
+          </a:xfrm>
+          <a:prstGeom prst="roundRect">
+            <a:avLst>
+              <a:gd name="adj" fmla="val 3478"/>
+            </a:avLst>
+          </a:prstGeom>
+          <a:solidFill>
+            <a:schemeClr val="bg2"/>
+          </a:solidFill>
+          <a:ln w="9525">
+            <a:solidFill>
+              <a:srgbClr val="C4CBD8"/>
+            </a:solidFill>
+            <a:prstDash val="solid"/>
+          </a:ln>
+        </p:spPr>
+      </p:sp>
+      <p:sp>
+        <p:nvSpPr>
+          <p:cNvPr id="26" name="Card label"/>
+          <p:cNvSpPr txBox="1"/>
+          <p:nvPr/>
+        </p:nvSpPr>
+        <p:spPr>
+          <a:xfrm>
+            <a:off x="8310677" y="4197096"/>
+            <a:ext cx="3149498" cy="310896"/>
+          </a:xfrm>
+          <a:prstGeom prst="rect">
+            <a:avLst/>
+          </a:prstGeom>
+          <a:noFill/>
+          <a:ln/>
+        </p:spPr>
+        <p:txBody>
+          <a:bodyPr wrap="square" lIns="0" tIns="0" rIns="0" bIns="0" rtlCol="0" anchor="ctr"/>
+          <a:lstStyle/>
+          <a:p>
+            <a:pPr indent="0" marL="0">
+              <a:buNone/>
+            </a:pPr>
+            <a:r>
+              <a:rPr lang="en-US" sz="1300" b="1" dirty="0">
+                <a:solidFill>
+                  <a:schemeClr val="accent1"/>
+                </a:solidFill>
+              </a:rPr>
+              <a:t>For the board</a:t>
+            </a:r>
+            <a:endParaRPr lang="en-US" sz="1300" dirty="0"/>
+          </a:p>
+        </p:txBody>
+      </p:sp>
+      <p:sp>
+        <p:nvSpPr>
+          <p:cNvPr id="27" name="Card head"/>
+          <p:cNvSpPr txBox="1"/>
+          <p:nvPr/>
+        </p:nvSpPr>
+        <p:spPr>
+          <a:xfrm>
+            <a:off x="8310677" y="4526280"/>
+            <a:ext cx="3149498" cy="576072"/>
+          </a:xfrm>
+          <a:prstGeom prst="rect">
+            <a:avLst/>
+          </a:prstGeom>
+          <a:noFill/>
+          <a:ln/>
+        </p:spPr>
+        <p:txBody>
+          <a:bodyPr wrap="square" lIns="0" tIns="0" rIns="0" bIns="0" rtlCol="0" anchor="t"/>
+          <a:lstStyle/>
+          <a:p>
+            <a:pPr indent="0" marL="0">
+              <a:buNone/>
+            </a:pPr>
+            <a:r>
+              <a:rPr lang="en-US" sz="1600" b="1" dirty="0">
+                <a:solidFill>
+                  <a:schemeClr val="tx1"/>
+                </a:solidFill>
+                <a:latin typeface="Cambria" pitchFamily="34" charset="0"/>
+                <a:ea typeface="Cambria" pitchFamily="34" charset="-122"/>
+                <a:cs typeface="Cambria" pitchFamily="34" charset="-120"/>
+              </a:rPr>
+              <a:t>Certified, or best found?</a:t>
+            </a:r>
+            <a:endParaRPr lang="en-US" sz="1600" dirty="0"/>
+          </a:p>
+        </p:txBody>
+      </p:sp>
+      <p:sp>
+        <p:nvSpPr>
+          <p:cNvPr id="28" name="Card text"/>
+          <p:cNvSpPr txBox="1"/>
+          <p:nvPr/>
+        </p:nvSpPr>
+        <p:spPr>
+          <a:xfrm>
+            <a:off x="8310677" y="5175504"/>
+            <a:ext cx="3149498" cy="868680"/>
+          </a:xfrm>
+          <a:prstGeom prst="rect">
+            <a:avLst/>
+          </a:prstGeom>
+          <a:noFill/>
+          <a:ln/>
+        </p:spPr>
+        <p:txBody>
+          <a:bodyPr wrap="square" lIns="0" tIns="0" rIns="0" bIns="0" rtlCol="0" anchor="t"/>
+          <a:lstStyle/>
+          <a:p>
+            <a:pPr indent="0" marL="0">
+              <a:buNone/>
+            </a:pPr>
+            <a:r>
+              <a:rPr lang="en-US" sz="1300" dirty="0">
+                <a:solidFill>
+                  <a:schemeClr val="tx2"/>
+                </a:solidFill>
+              </a:rPr>
+              <a:t>If we fix part of the answer to make the rest solvable, what might the fixed part cost us?</a:t>
+            </a:r>
+            <a:endParaRPr lang="en-US" sz="1300" dirty="0"/>
           </a:p>
         </p:txBody>
       </p:sp>
@@ -16932,7 +17005,7 @@
                   <a:schemeClr val="accent1"/>
                 </a:solidFill>
               </a:rPr>
-              <a:t>KEY TAKEAWAYS</a:t>
+              <a:t>AXIOM LAB 2.4 · MODULE AXIOM-04</a:t>
             </a:r>
             <a:endParaRPr lang="en-US" sz="1200" dirty="0"/>
           </a:p>
@@ -16973,22 +17046,105 @@
                 <a:ea typeface="Cambria" pitchFamily="34" charset="-122"/>
                 <a:cs typeface="Cambria" pitchFamily="34" charset="-120"/>
               </a:rPr>
-              <a:t>What to carry forward</a:t>
+              <a:t>Search, bound and branch, in AXIOM</a:t>
             </a:r>
             <a:endParaRPr lang="en-US" sz="3200" dirty="0"/>
           </a:p>
         </p:txBody>
       </p:sp>
-      <p:sp>
-        <p:nvSpPr>
-          <p:cNvPr id="5" name="Number"/>
+      <p:pic>
+        <p:nvPicPr>
+          <p:cNvPr id="5" name="AXIOM logo" descr="AXIOM">    </p:cNvPr>
+          <p:cNvPicPr>
+            <a:picLocks noChangeAspect="1"/>
+          </p:cNvPicPr>
+          <p:nvPr/>
+        </p:nvPicPr>
+        <p:blipFill>
+          <a:blip r:embed="rId1"/>
+          <a:stretch>
+            <a:fillRect/>
+          </a:stretch>
+        </p:blipFill>
+        <p:spPr>
+          <a:xfrm>
+            <a:off x="9539935" y="310896"/>
+            <a:ext cx="2103120" cy="420624"/>
+          </a:xfrm>
+          <a:prstGeom prst="rect">
+            <a:avLst/>
+          </a:prstGeom>
+        </p:spPr>
+      </p:pic>
+      <p:sp>
+        <p:nvSpPr>
+          <p:cNvPr id="6" name="Situation"/>
+          <p:cNvSpPr txBox="1"/>
+          <p:nvPr/>
+        </p:nvSpPr>
+        <p:spPr>
+          <a:xfrm>
+            <a:off x="548640" y="1645920"/>
+            <a:ext cx="11094415" cy="777240"/>
+          </a:xfrm>
+          <a:prstGeom prst="rect">
+            <a:avLst/>
+          </a:prstGeom>
+          <a:noFill/>
+          <a:ln/>
+        </p:spPr>
+        <p:txBody>
+          <a:bodyPr wrap="square" lIns="0" tIns="0" rIns="0" bIns="0" rtlCol="0" anchor="t"/>
+          <a:lstStyle/>
+          <a:p>
+            <a:pPr indent="0" marL="0">
+              <a:buNone/>
+            </a:pPr>
+            <a:r>
+              <a:rPr lang="en-US" sz="1500" dirty="0">
+                <a:solidFill>
+                  <a:schemeClr val="tx1"/>
+                </a:solidFill>
+              </a:rPr>
+              <a:t>Meridian's chief operating officer can automate plant lines in part, and her planners' optimizer returns different plans from different starts. The chief financial officer wants the inventory, an audit of each plan and a proof of the best before the board meets. Open AXIOM, choose Lab 2.4 and load the Meridian partial-round instance.</a:t>
+            </a:r>
+            <a:endParaRPr lang="en-US" sz="1500" dirty="0"/>
+          </a:p>
+        </p:txBody>
+      </p:sp>
+      <p:sp>
+        <p:nvSpPr>
+          <p:cNvPr id="7" name="Flow line"/>
           <p:cNvSpPr/>
           <p:nvPr/>
         </p:nvSpPr>
         <p:spPr>
           <a:xfrm>
-            <a:off x="548640" y="1737360"/>
-            <a:ext cx="566928" cy="566928"/>
+            <a:off x="1658082" y="2880360"/>
+            <a:ext cx="8875532" cy="0"/>
+          </a:xfrm>
+          <a:prstGeom prst="line">
+            <a:avLst/>
+          </a:prstGeom>
+          <a:noFill/>
+          <a:ln w="25400">
+            <a:solidFill>
+              <a:srgbClr val="C4CBD8"/>
+            </a:solidFill>
+            <a:prstDash val="solid"/>
+          </a:ln>
+        </p:spPr>
+      </p:sp>
+      <p:sp>
+        <p:nvSpPr>
+          <p:cNvPr id="8" name="Number"/>
+          <p:cNvSpPr/>
+          <p:nvPr/>
+        </p:nvSpPr>
+        <p:spPr>
+          <a:xfrm>
+            <a:off x="1383762" y="2606040"/>
+            <a:ext cx="548640" cy="548640"/>
           </a:xfrm>
           <a:prstGeom prst="ellipse">
             <a:avLst/>
@@ -17006,14 +17162,14 @@
       </p:sp>
       <p:sp>
         <p:nvSpPr>
-          <p:cNvPr id="6" name="Text 3"/>
+          <p:cNvPr id="9" name="Text 5"/>
           <p:cNvSpPr txBox="1"/>
           <p:nvPr/>
         </p:nvSpPr>
         <p:spPr>
           <a:xfrm>
-            <a:off x="548640" y="1737360"/>
-            <a:ext cx="566928" cy="566928"/>
+            <a:off x="1383762" y="2606040"/>
+            <a:ext cx="548640" cy="548640"/>
           </a:xfrm>
           <a:prstGeom prst="rect">
             <a:avLst/>
@@ -17029,7 +17185,7 @@
               <a:buNone/>
             </a:pPr>
             <a:r>
-              <a:rPr lang="en-US" sz="1500" b="1" dirty="0">
+              <a:rPr lang="en-US" sz="1600" b="1" dirty="0">
                 <a:solidFill>
                   <a:schemeClr val="bg1"/>
                 </a:solidFill>
@@ -17039,20 +17195,20 @@
               </a:rPr>
               <a:t>1</a:t>
             </a:r>
-            <a:endParaRPr lang="en-US" sz="1500" dirty="0"/>
-          </a:p>
-        </p:txBody>
-      </p:sp>
-      <p:sp>
-        <p:nvSpPr>
-          <p:cNvPr id="7" name="Row text"/>
+            <a:endParaRPr lang="en-US" sz="1600" dirty="0"/>
+          </a:p>
+        </p:txBody>
+      </p:sp>
+      <p:sp>
+        <p:nvSpPr>
+          <p:cNvPr id="10" name="Flow head"/>
           <p:cNvSpPr txBox="1"/>
           <p:nvPr/>
         </p:nvSpPr>
         <p:spPr>
           <a:xfrm>
-            <a:off x="1325880" y="1691640"/>
-            <a:ext cx="10317175" cy="841248"/>
+            <a:off x="621792" y="3291840"/>
+            <a:ext cx="2072579" cy="548640"/>
           </a:xfrm>
           <a:prstGeom prst="rect">
             <a:avLst/>
@@ -17061,34 +17217,73 @@
           <a:ln/>
         </p:spPr>
         <p:txBody>
-          <a:bodyPr wrap="square" lIns="0" tIns="0" rIns="0" bIns="0" rtlCol="0" anchor="ctr"/>
-          <a:lstStyle/>
-          <a:p>
-            <a:pPr indent="0" marL="0">
+          <a:bodyPr wrap="square" lIns="0" tIns="0" rIns="0" bIns="0" rtlCol="0" anchor="t"/>
+          <a:lstStyle/>
+          <a:p>
+            <a:pPr algn="ctr" indent="0" marL="0">
               <a:buNone/>
             </a:pPr>
             <a:r>
-              <a:rPr lang="en-US" sz="1500" dirty="0">
+              <a:rPr lang="en-US" sz="1600" b="1" dirty="0">
                 <a:solidFill>
                   <a:schemeClr val="tx1"/>
                 </a:solidFill>
-              </a:rPr>
-              <a:t>Beyond convexity the questions stay and the guarantees go: several local maxima, KKT points that are saddles, prices that hold only nearby, and gaps that no price list closes.</a:t>
-            </a:r>
-            <a:endParaRPr lang="en-US" sz="1500" dirty="0"/>
-          </a:p>
-        </p:txBody>
-      </p:sp>
-      <p:sp>
-        <p:nvSpPr>
-          <p:cNvPr id="8" name="Number"/>
+                <a:latin typeface="Cambria" pitchFamily="34" charset="0"/>
+                <a:ea typeface="Cambria" pitchFamily="34" charset="-122"/>
+                <a:cs typeface="Cambria" pitchFamily="34" charset="-120"/>
+              </a:rPr>
+              <a:t>Explore</a:t>
+            </a:r>
+            <a:endParaRPr lang="en-US" sz="1600" dirty="0"/>
+          </a:p>
+        </p:txBody>
+      </p:sp>
+      <p:sp>
+        <p:nvSpPr>
+          <p:cNvPr id="11" name="Flow text"/>
+          <p:cNvSpPr txBox="1"/>
+          <p:nvPr/>
+        </p:nvSpPr>
+        <p:spPr>
+          <a:xfrm>
+            <a:off x="640080" y="3867912"/>
+            <a:ext cx="2036003" cy="1554480"/>
+          </a:xfrm>
+          <a:prstGeom prst="rect">
+            <a:avLst/>
+          </a:prstGeom>
+          <a:noFill/>
+          <a:ln/>
+        </p:spPr>
+        <p:txBody>
+          <a:bodyPr wrap="square" lIns="0" tIns="0" rIns="0" bIns="0" rtlCol="0" anchor="t"/>
+          <a:lstStyle/>
+          <a:p>
+            <a:pPr algn="ctr" indent="0" marL="0">
+              <a:buNone/>
+            </a:pPr>
+            <a:r>
+              <a:rPr lang="en-US" sz="1400" dirty="0">
+                <a:solidFill>
+                  <a:schemeClr val="tx2"/>
+                </a:solidFill>
+              </a:rPr>
+              <a:t>Draw the value where only years 4 and 5 vary: two corner peaks, the saddle, the Hessian.</a:t>
+            </a:r>
+            <a:endParaRPr lang="en-US" sz="1400" dirty="0"/>
+          </a:p>
+        </p:txBody>
+      </p:sp>
+      <p:sp>
+        <p:nvSpPr>
+          <p:cNvPr id="12" name="Number"/>
           <p:cNvSpPr/>
           <p:nvPr/>
         </p:nvSpPr>
         <p:spPr>
           <a:xfrm>
-            <a:off x="548640" y="2633472"/>
-            <a:ext cx="566928" cy="566928"/>
+            <a:off x="3602645" y="2606040"/>
+            <a:ext cx="548640" cy="548640"/>
           </a:xfrm>
           <a:prstGeom prst="ellipse">
             <a:avLst/>
@@ -17106,14 +17301,14 @@
       </p:sp>
       <p:sp>
         <p:nvSpPr>
-          <p:cNvPr id="9" name="Text 6"/>
+          <p:cNvPr id="13" name="Text 9"/>
           <p:cNvSpPr txBox="1"/>
           <p:nvPr/>
         </p:nvSpPr>
         <p:spPr>
           <a:xfrm>
-            <a:off x="548640" y="2633472"/>
-            <a:ext cx="566928" cy="566928"/>
+            <a:off x="3602645" y="2606040"/>
+            <a:ext cx="548640" cy="548640"/>
           </a:xfrm>
           <a:prstGeom prst="rect">
             <a:avLst/>
@@ -17129,7 +17324,7 @@
               <a:buNone/>
             </a:pPr>
             <a:r>
-              <a:rPr lang="en-US" sz="1500" b="1" dirty="0">
+              <a:rPr lang="en-US" sz="1600" b="1" dirty="0">
                 <a:solidFill>
                   <a:schemeClr val="bg1"/>
                 </a:solidFill>
@@ -17139,20 +17334,20 @@
               </a:rPr>
               <a:t>2</a:t>
             </a:r>
-            <a:endParaRPr lang="en-US" sz="1500" dirty="0"/>
-          </a:p>
-        </p:txBody>
-      </p:sp>
-      <p:sp>
-        <p:nvSpPr>
-          <p:cNvPr id="10" name="Row text"/>
+            <a:endParaRPr lang="en-US" sz="1600" dirty="0"/>
+          </a:p>
+        </p:txBody>
+      </p:sp>
+      <p:sp>
+        <p:nvSpPr>
+          <p:cNvPr id="14" name="Flow head"/>
           <p:cNvSpPr txBox="1"/>
           <p:nvPr/>
         </p:nvSpPr>
         <p:spPr>
           <a:xfrm>
-            <a:off x="1325880" y="2587752"/>
-            <a:ext cx="10317175" cy="841248"/>
+            <a:off x="2840675" y="3291840"/>
+            <a:ext cx="2072579" cy="548640"/>
           </a:xfrm>
           <a:prstGeom prst="rect">
             <a:avLst/>
@@ -17161,34 +17356,73 @@
           <a:ln/>
         </p:spPr>
         <p:txBody>
-          <a:bodyPr wrap="square" lIns="0" tIns="0" rIns="0" bIns="0" rtlCol="0" anchor="ctr"/>
-          <a:lstStyle/>
-          <a:p>
-            <a:pPr indent="0" marL="0">
+          <a:bodyPr wrap="square" lIns="0" tIns="0" rIns="0" bIns="0" rtlCol="0" anchor="t"/>
+          <a:lstStyle/>
+          <a:p>
+            <a:pPr algn="ctr" indent="0" marL="0">
               <a:buNone/>
             </a:pPr>
             <a:r>
-              <a:rPr lang="en-US" sz="1500" dirty="0">
+              <a:rPr lang="en-US" sz="1600" b="1" dirty="0">
                 <a:solidFill>
                   <a:schemeClr val="tx1"/>
                 </a:solidFill>
-              </a:rPr>
-              <a:t>A local answer is audited in two steps, first order and second order; the audit proves a plan best among its neighbors, never overall.</a:t>
-            </a:r>
-            <a:endParaRPr lang="en-US" sz="1500" dirty="0"/>
-          </a:p>
-        </p:txBody>
-      </p:sp>
-      <p:sp>
-        <p:nvSpPr>
-          <p:cNvPr id="11" name="Number"/>
+                <a:latin typeface="Cambria" pitchFamily="34" charset="0"/>
+                <a:ea typeface="Cambria" pitchFamily="34" charset="-122"/>
+                <a:cs typeface="Cambria" pitchFamily="34" charset="-120"/>
+              </a:rPr>
+              <a:t>Search</a:t>
+            </a:r>
+            <a:endParaRPr lang="en-US" sz="1600" dirty="0"/>
+          </a:p>
+        </p:txBody>
+      </p:sp>
+      <p:sp>
+        <p:nvSpPr>
+          <p:cNvPr id="15" name="Flow text"/>
+          <p:cNvSpPr txBox="1"/>
+          <p:nvPr/>
+        </p:nvSpPr>
+        <p:spPr>
+          <a:xfrm>
+            <a:off x="2858963" y="3867912"/>
+            <a:ext cx="2036003" cy="1554480"/>
+          </a:xfrm>
+          <a:prstGeom prst="rect">
+            <a:avLst/>
+          </a:prstGeom>
+          <a:noFill/>
+          <a:ln/>
+        </p:spPr>
+        <p:txBody>
+          <a:bodyPr wrap="square" lIns="0" tIns="0" rIns="0" bIns="0" rtlCol="0" anchor="t"/>
+          <a:lstStyle/>
+          <a:p>
+            <a:pPr algn="ctr" indent="0" marL="0">
+              <a:buNone/>
+            </a:pPr>
+            <a:r>
+              <a:rPr lang="en-US" sz="1400" dirty="0">
+                <a:solidFill>
+                  <a:schemeClr val="tx2"/>
+                </a:solidFill>
+              </a:rPr>
+              <a:t>Run SLSQP and the interior-point solver from 100 seeded starts; compare inventories and iterations.</a:t>
+            </a:r>
+            <a:endParaRPr lang="en-US" sz="1400" dirty="0"/>
+          </a:p>
+        </p:txBody>
+      </p:sp>
+      <p:sp>
+        <p:nvSpPr>
+          <p:cNvPr id="16" name="Number"/>
           <p:cNvSpPr/>
           <p:nvPr/>
         </p:nvSpPr>
         <p:spPr>
           <a:xfrm>
-            <a:off x="548640" y="3529584"/>
-            <a:ext cx="566928" cy="566928"/>
+            <a:off x="5821528" y="2606040"/>
+            <a:ext cx="548640" cy="548640"/>
           </a:xfrm>
           <a:prstGeom prst="ellipse">
             <a:avLst/>
@@ -17206,14 +17440,14 @@
       </p:sp>
       <p:sp>
         <p:nvSpPr>
-          <p:cNvPr id="12" name="Text 9"/>
+          <p:cNvPr id="17" name="Text 13"/>
           <p:cNvSpPr txBox="1"/>
           <p:nvPr/>
         </p:nvSpPr>
         <p:spPr>
           <a:xfrm>
-            <a:off x="548640" y="3529584"/>
-            <a:ext cx="566928" cy="566928"/>
+            <a:off x="5821528" y="2606040"/>
+            <a:ext cx="548640" cy="548640"/>
           </a:xfrm>
           <a:prstGeom prst="rect">
             <a:avLst/>
@@ -17229,7 +17463,7 @@
               <a:buNone/>
             </a:pPr>
             <a:r>
-              <a:rPr lang="en-US" sz="1500" b="1" dirty="0">
+              <a:rPr lang="en-US" sz="1600" b="1" dirty="0">
                 <a:solidFill>
                   <a:schemeClr val="bg1"/>
                 </a:solidFill>
@@ -17239,20 +17473,20 @@
               </a:rPr>
               <a:t>3</a:t>
             </a:r>
-            <a:endParaRPr lang="en-US" sz="1500" dirty="0"/>
-          </a:p>
-        </p:txBody>
-      </p:sp>
-      <p:sp>
-        <p:nvSpPr>
-          <p:cNvPr id="13" name="Row text"/>
+            <a:endParaRPr lang="en-US" sz="1600" dirty="0"/>
+          </a:p>
+        </p:txBody>
+      </p:sp>
+      <p:sp>
+        <p:nvSpPr>
+          <p:cNvPr id="18" name="Flow head"/>
           <p:cNvSpPr txBox="1"/>
           <p:nvPr/>
         </p:nvSpPr>
         <p:spPr>
           <a:xfrm>
-            <a:off x="1325880" y="3483864"/>
-            <a:ext cx="10317175" cy="841248"/>
+            <a:off x="5059558" y="3291840"/>
+            <a:ext cx="2072579" cy="548640"/>
           </a:xfrm>
           <a:prstGeom prst="rect">
             <a:avLst/>
@@ -17261,34 +17495,73 @@
           <a:ln/>
         </p:spPr>
         <p:txBody>
-          <a:bodyPr wrap="square" lIns="0" tIns="0" rIns="0" bIns="0" rtlCol="0" anchor="ctr"/>
-          <a:lstStyle/>
-          <a:p>
-            <a:pPr indent="0" marL="0">
+          <a:bodyPr wrap="square" lIns="0" tIns="0" rIns="0" bIns="0" rtlCol="0" anchor="t"/>
+          <a:lstStyle/>
+          <a:p>
+            <a:pPr algn="ctr" indent="0" marL="0">
               <a:buNone/>
             </a:pPr>
             <a:r>
-              <a:rPr lang="en-US" sz="1500" dirty="0">
+              <a:rPr lang="en-US" sz="1600" b="1" dirty="0">
                 <a:solidFill>
                   <a:schemeClr val="tx1"/>
                 </a:solidFill>
-              </a:rPr>
-              <a:t>Multipliers exist under a constraint qualification and are local prices: under the second-order certificate and strict complementarity plans and prices move smoothly, and where local values cross the best plan jumps.</a:t>
-            </a:r>
-            <a:endParaRPr lang="en-US" sz="1500" dirty="0"/>
-          </a:p>
-        </p:txBody>
-      </p:sp>
-      <p:sp>
-        <p:nvSpPr>
-          <p:cNvPr id="14" name="Number"/>
+                <a:latin typeface="Cambria" pitchFamily="34" charset="0"/>
+                <a:ea typeface="Cambria" pitchFamily="34" charset="-122"/>
+                <a:cs typeface="Cambria" pitchFamily="34" charset="-120"/>
+              </a:rPr>
+              <a:t>Audit</a:t>
+            </a:r>
+            <a:endParaRPr lang="en-US" sz="1600" dirty="0"/>
+          </a:p>
+        </p:txBody>
+      </p:sp>
+      <p:sp>
+        <p:nvSpPr>
+          <p:cNvPr id="19" name="Flow text"/>
+          <p:cNvSpPr txBox="1"/>
+          <p:nvPr/>
+        </p:nvSpPr>
+        <p:spPr>
+          <a:xfrm>
+            <a:off x="5077846" y="3867912"/>
+            <a:ext cx="2036003" cy="1554480"/>
+          </a:xfrm>
+          <a:prstGeom prst="rect">
+            <a:avLst/>
+          </a:prstGeom>
+          <a:noFill/>
+          <a:ln/>
+        </p:spPr>
+        <p:txBody>
+          <a:bodyPr wrap="square" lIns="0" tIns="0" rIns="0" bIns="0" rtlCol="0" anchor="t"/>
+          <a:lstStyle/>
+          <a:p>
+            <a:pPr algn="ctr" indent="0" marL="0">
+              <a:buNone/>
+            </a:pPr>
+            <a:r>
+              <a:rPr lang="en-US" sz="1400" dirty="0">
+                <a:solidFill>
+                  <a:schemeClr val="tx2"/>
+                </a:solidFill>
+              </a:rPr>
+              <a:t>Verify the KKT conditions at each answer and the saddle: residuals, LICQ, the reduced Hessian.</a:t>
+            </a:r>
+            <a:endParaRPr lang="en-US" sz="1400" dirty="0"/>
+          </a:p>
+        </p:txBody>
+      </p:sp>
+      <p:sp>
+        <p:nvSpPr>
+          <p:cNvPr id="20" name="Number"/>
           <p:cNvSpPr/>
           <p:nvPr/>
         </p:nvSpPr>
         <p:spPr>
           <a:xfrm>
-            <a:off x="548640" y="4425696"/>
-            <a:ext cx="566928" cy="566928"/>
+            <a:off x="8040411" y="2606040"/>
+            <a:ext cx="548640" cy="548640"/>
           </a:xfrm>
           <a:prstGeom prst="ellipse">
             <a:avLst/>
@@ -17306,14 +17579,14 @@
       </p:sp>
       <p:sp>
         <p:nvSpPr>
-          <p:cNvPr id="15" name="Text 12"/>
+          <p:cNvPr id="21" name="Text 17"/>
           <p:cNvSpPr txBox="1"/>
           <p:nvPr/>
         </p:nvSpPr>
         <p:spPr>
           <a:xfrm>
-            <a:off x="548640" y="4425696"/>
-            <a:ext cx="566928" cy="566928"/>
+            <a:off x="8040411" y="2606040"/>
+            <a:ext cx="548640" cy="548640"/>
           </a:xfrm>
           <a:prstGeom prst="rect">
             <a:avLst/>
@@ -17329,7 +17602,7 @@
               <a:buNone/>
             </a:pPr>
             <a:r>
-              <a:rPr lang="en-US" sz="1500" b="1" dirty="0">
+              <a:rPr lang="en-US" sz="1600" b="1" dirty="0">
                 <a:solidFill>
                   <a:schemeClr val="bg1"/>
                 </a:solidFill>
@@ -17339,20 +17612,20 @@
               </a:rPr>
               <a:t>4</a:t>
             </a:r>
-            <a:endParaRPr lang="en-US" sz="1500" dirty="0"/>
-          </a:p>
-        </p:txBody>
-      </p:sp>
-      <p:sp>
-        <p:nvSpPr>
-          <p:cNvPr id="16" name="Row text"/>
+            <a:endParaRPr lang="en-US" sz="1600" dirty="0"/>
+          </a:p>
+        </p:txBody>
+      </p:sp>
+      <p:sp>
+        <p:nvSpPr>
+          <p:cNvPr id="22" name="Flow head"/>
           <p:cNvSpPr txBox="1"/>
           <p:nvPr/>
         </p:nvSpPr>
         <p:spPr>
           <a:xfrm>
-            <a:off x="1325880" y="4379976"/>
-            <a:ext cx="10317175" cy="841248"/>
+            <a:off x="7278441" y="3291840"/>
+            <a:ext cx="2072579" cy="548640"/>
           </a:xfrm>
           <a:prstGeom prst="rect">
             <a:avLst/>
@@ -17361,34 +17634,73 @@
           <a:ln/>
         </p:spPr>
         <p:txBody>
-          <a:bodyPr wrap="square" lIns="0" tIns="0" rIns="0" bIns="0" rtlCol="0" anchor="ctr"/>
-          <a:lstStyle/>
-          <a:p>
-            <a:pPr indent="0" marL="0">
+          <a:bodyPr wrap="square" lIns="0" tIns="0" rIns="0" bIns="0" rtlCol="0" anchor="t"/>
+          <a:lstStyle/>
+          <a:p>
+            <a:pPr algn="ctr" indent="0" marL="0">
               <a:buNone/>
             </a:pPr>
             <a:r>
-              <a:rPr lang="en-US" sz="1500" dirty="0">
+              <a:rPr lang="en-US" sz="1600" b="1" dirty="0">
                 <a:solidFill>
                   <a:schemeClr val="tx1"/>
                 </a:solidFill>
-              </a:rPr>
-              <a:t>Search from many starts, report the inventory, and bound it: a convex relaxation or a price list bounds what no start reached, and when decisions multiply, part measures never pay.</a:t>
-            </a:r>
-            <a:endParaRPr lang="en-US" sz="1500" dirty="0"/>
-          </a:p>
-        </p:txBody>
-      </p:sp>
-      <p:sp>
-        <p:nvSpPr>
-          <p:cNvPr id="17" name="Number"/>
+                <a:latin typeface="Cambria" pitchFamily="34" charset="0"/>
+                <a:ea typeface="Cambria" pitchFamily="34" charset="-122"/>
+                <a:cs typeface="Cambria" pitchFamily="34" charset="-120"/>
+              </a:rPr>
+              <a:t>Bound</a:t>
+            </a:r>
+            <a:endParaRPr lang="en-US" sz="1600" dirty="0"/>
+          </a:p>
+        </p:txBody>
+      </p:sp>
+      <p:sp>
+        <p:nvSpPr>
+          <p:cNvPr id="23" name="Flow text"/>
+          <p:cNvSpPr txBox="1"/>
+          <p:nvPr/>
+        </p:nvSpPr>
+        <p:spPr>
+          <a:xfrm>
+            <a:off x="7296729" y="3867912"/>
+            <a:ext cx="2036003" cy="1554480"/>
+          </a:xfrm>
+          <a:prstGeom prst="rect">
+            <a:avLst/>
+          </a:prstGeom>
+          <a:noFill/>
+          <a:ln/>
+        </p:spPr>
+        <p:txBody>
+          <a:bodyPr wrap="square" lIns="0" tIns="0" rIns="0" bIns="0" rtlCol="0" anchor="t"/>
+          <a:lstStyle/>
+          <a:p>
+            <a:pPr algn="ctr" indent="0" marL="0">
+              <a:buNone/>
+            </a:pPr>
+            <a:r>
+              <a:rPr lang="en-US" sz="1400" dirty="0">
+                <a:solidFill>
+                  <a:schemeClr val="tx2"/>
+                </a:solidFill>
+              </a:rPr>
+              <a:t>Solve Lab 2.3's relaxation and compute each answer's distance from the ceiling.</a:t>
+            </a:r>
+            <a:endParaRPr lang="en-US" sz="1400" dirty="0"/>
+          </a:p>
+        </p:txBody>
+      </p:sp>
+      <p:sp>
+        <p:nvSpPr>
+          <p:cNvPr id="24" name="Number"/>
           <p:cNvSpPr/>
           <p:nvPr/>
         </p:nvSpPr>
         <p:spPr>
           <a:xfrm>
-            <a:off x="548640" y="5321808"/>
-            <a:ext cx="566928" cy="566928"/>
+            <a:off x="10259294" y="2606040"/>
+            <a:ext cx="548640" cy="548640"/>
           </a:xfrm>
           <a:prstGeom prst="ellipse">
             <a:avLst/>
@@ -17406,14 +17718,14 @@
       </p:sp>
       <p:sp>
         <p:nvSpPr>
-          <p:cNvPr id="18" name="Text 15"/>
+          <p:cNvPr id="25" name="Text 21"/>
           <p:cNvSpPr txBox="1"/>
           <p:nvPr/>
         </p:nvSpPr>
         <p:spPr>
           <a:xfrm>
-            <a:off x="548640" y="5321808"/>
-            <a:ext cx="566928" cy="566928"/>
+            <a:off x="10259294" y="2606040"/>
+            <a:ext cx="548640" cy="548640"/>
           </a:xfrm>
           <a:prstGeom prst="rect">
             <a:avLst/>
@@ -17429,7 +17741,7 @@
               <a:buNone/>
             </a:pPr>
             <a:r>
-              <a:rPr lang="en-US" sz="1500" b="1" dirty="0">
+              <a:rPr lang="en-US" sz="1600" b="1" dirty="0">
                 <a:solidFill>
                   <a:schemeClr val="bg1"/>
                 </a:solidFill>
@@ -17439,20 +17751,20 @@
               </a:rPr>
               <a:t>5</a:t>
             </a:r>
-            <a:endParaRPr lang="en-US" sz="1500" dirty="0"/>
-          </a:p>
-        </p:txBody>
-      </p:sp>
-      <p:sp>
-        <p:nvSpPr>
-          <p:cNvPr id="19" name="Row text"/>
+            <a:endParaRPr lang="en-US" sz="1600" dirty="0"/>
+          </a:p>
+        </p:txBody>
+      </p:sp>
+      <p:sp>
+        <p:nvSpPr>
+          <p:cNvPr id="26" name="Flow head"/>
           <p:cNvSpPr txBox="1"/>
           <p:nvPr/>
         </p:nvSpPr>
         <p:spPr>
           <a:xfrm>
-            <a:off x="1325880" y="5276088"/>
-            <a:ext cx="10317175" cy="841248"/>
+            <a:off x="9497324" y="3291840"/>
+            <a:ext cx="2072579" cy="548640"/>
           </a:xfrm>
           <a:prstGeom prst="rect">
             <a:avLst/>
@@ -17461,6 +17773,108 @@
           <a:ln/>
         </p:spPr>
         <p:txBody>
+          <a:bodyPr wrap="square" lIns="0" tIns="0" rIns="0" bIns="0" rtlCol="0" anchor="t"/>
+          <a:lstStyle/>
+          <a:p>
+            <a:pPr algn="ctr" indent="0" marL="0">
+              <a:buNone/>
+            </a:pPr>
+            <a:r>
+              <a:rPr lang="en-US" sz="1600" b="1" dirty="0">
+                <a:solidFill>
+                  <a:schemeClr val="tx1"/>
+                </a:solidFill>
+                <a:latin typeface="Cambria" pitchFamily="34" charset="0"/>
+                <a:ea typeface="Cambria" pitchFamily="34" charset="-122"/>
+                <a:cs typeface="Cambria" pitchFamily="34" charset="-120"/>
+              </a:rPr>
+              <a:t>Branch</a:t>
+            </a:r>
+            <a:endParaRPr lang="en-US" sz="1600" dirty="0"/>
+          </a:p>
+        </p:txBody>
+      </p:sp>
+      <p:sp>
+        <p:nvSpPr>
+          <p:cNvPr id="27" name="Flow text"/>
+          <p:cNvSpPr txBox="1"/>
+          <p:nvPr/>
+        </p:nvSpPr>
+        <p:spPr>
+          <a:xfrm>
+            <a:off x="9515612" y="3867912"/>
+            <a:ext cx="2036003" cy="1554480"/>
+          </a:xfrm>
+          <a:prstGeom prst="rect">
+            <a:avLst/>
+          </a:prstGeom>
+          <a:noFill/>
+          <a:ln/>
+        </p:spPr>
+        <p:txBody>
+          <a:bodyPr wrap="square" lIns="0" tIns="0" rIns="0" bIns="0" rtlCol="0" anchor="t"/>
+          <a:lstStyle/>
+          <a:p>
+            <a:pPr algn="ctr" indent="0" marL="0">
+              <a:buNone/>
+            </a:pPr>
+            <a:r>
+              <a:rPr lang="en-US" sz="1400" dirty="0">
+                <a:solidFill>
+                  <a:schemeClr val="tx2"/>
+                </a:solidFill>
+              </a:rPr>
+              <a:t>Fix the year-5 round at none and at whole, re-solve, and continue until every node settles.</a:t>
+            </a:r>
+            <a:endParaRPr lang="en-US" sz="1400" dirty="0"/>
+          </a:p>
+        </p:txBody>
+      </p:sp>
+      <p:sp>
+        <p:nvSpPr>
+          <p:cNvPr id="28" name="Deliverable card"/>
+          <p:cNvSpPr/>
+          <p:nvPr/>
+        </p:nvSpPr>
+        <p:spPr>
+          <a:xfrm>
+            <a:off x="548640" y="5486400"/>
+            <a:ext cx="11094415" cy="685800"/>
+          </a:xfrm>
+          <a:prstGeom prst="roundRect">
+            <a:avLst>
+              <a:gd name="adj" fmla="val 10667"/>
+            </a:avLst>
+          </a:prstGeom>
+          <a:solidFill>
+            <a:schemeClr val="bg2"/>
+          </a:solidFill>
+          <a:ln w="9525">
+            <a:solidFill>
+              <a:srgbClr val="C4CBD8"/>
+            </a:solidFill>
+            <a:prstDash val="solid"/>
+          </a:ln>
+        </p:spPr>
+      </p:sp>
+      <p:sp>
+        <p:nvSpPr>
+          <p:cNvPr id="29" name="Deliverable"/>
+          <p:cNvSpPr txBox="1"/>
+          <p:nvPr/>
+        </p:nvSpPr>
+        <p:spPr>
+          <a:xfrm>
+            <a:off x="777240" y="5559552"/>
+            <a:ext cx="10637215" cy="539496"/>
+          </a:xfrm>
+          <a:prstGeom prst="rect">
+            <a:avLst/>
+          </a:prstGeom>
+          <a:noFill/>
+          <a:ln/>
+        </p:spPr>
+        <p:txBody>
           <a:bodyPr wrap="square" lIns="0" tIns="0" rIns="0" bIns="0" rtlCol="0" anchor="ctr"/>
           <a:lstStyle/>
           <a:p>
@@ -17468,14 +17882,22 @@
               <a:buNone/>
             </a:pPr>
             <a:r>
-              <a:rPr lang="en-US" sz="1500" dirty="0">
+              <a:rPr lang="en-US" sz="1400" b="1" dirty="0">
                 <a:solidFill>
                   <a:schemeClr val="tx1"/>
                 </a:solidFill>
               </a:rPr>
-              <a:t>Lumpy decisions are formulated with binaries and true ranges and solved by branch-and-bound, which certifies a gap at every stage; cutting planes and decomposition scale it, and five convex solves prove Meridian's four-round plan best.</a:t>
-            </a:r>
-            <a:endParaRPr lang="en-US" sz="1500" dirty="0"/>
+              <a:t>Deliverable:</a:t>
+            </a:r>
+            <a:r>
+              <a:rPr lang="en-US" sz="1400" dirty="0">
+                <a:solidFill>
+                  <a:schemeClr val="tx1"/>
+                </a:solidFill>
+              </a:rPr>
+              <a:t> a one-page note to the board: the inventory of local answers with their audits, the ceiling and each answer's distance from it, the branch-and-bound certificate, and a recommendation on partial automation. About 75 minutes.</a:t>
+            </a:r>
+            <a:endParaRPr lang="en-US" sz="1400" dirty="0"/>
           </a:p>
         </p:txBody>
       </p:sp>
@@ -17581,7 +18003,7 @@
                   <a:schemeClr val="accent1"/>
                 </a:solidFill>
               </a:rPr>
-              <a:t>THIS WEEK'S LABORATORY</a:t>
+              <a:t>KEY TAKEAWAYS</a:t>
             </a:r>
             <a:endParaRPr lang="en-US" sz="1200" dirty="0"/>
           </a:p>
@@ -17622,7 +18044,7 @@
                 <a:ea typeface="Cambria" pitchFamily="34" charset="-122"/>
                 <a:cs typeface="Cambria" pitchFamily="34" charset="-120"/>
               </a:rPr>
-              <a:t>Notebook and workbook reproduce the book</a:t>
+              <a:t>What to carry forward</a:t>
             </a:r>
             <a:endParaRPr lang="en-US" sz="3200" dirty="0"/>
           </a:p>
@@ -17630,26 +18052,24 @@
       </p:sp>
       <p:sp>
         <p:nvSpPr>
-          <p:cNvPr id="5" name="Stat card"/>
+          <p:cNvPr id="5" name="Number"/>
           <p:cNvSpPr/>
           <p:nvPr/>
         </p:nvSpPr>
         <p:spPr>
           <a:xfrm>
-            <a:off x="548640" y="1691640"/>
-            <a:ext cx="2567864" cy="1691640"/>
-          </a:xfrm>
-          <a:prstGeom prst="roundRect">
-            <a:avLst>
-              <a:gd name="adj" fmla="val 4324"/>
-            </a:avLst>
+            <a:off x="548640" y="1737360"/>
+            <a:ext cx="566928" cy="566928"/>
+          </a:xfrm>
+          <a:prstGeom prst="ellipse">
+            <a:avLst/>
           </a:prstGeom>
           <a:solidFill>
-            <a:schemeClr val="tx1"/>
+            <a:schemeClr val="accent1"/>
           </a:solidFill>
-          <a:ln w="9525">
+          <a:ln w="6350">
             <a:solidFill>
-              <a:srgbClr val="0F1E3D"/>
+              <a:schemeClr val="accent1"/>
             </a:solidFill>
             <a:prstDash val="solid"/>
           </a:ln>
@@ -17657,14 +18077,14 @@
       </p:sp>
       <p:sp>
         <p:nvSpPr>
-          <p:cNvPr id="6" name="Stat value"/>
+          <p:cNvPr id="6" name="Text 3"/>
           <p:cNvSpPr txBox="1"/>
           <p:nvPr/>
         </p:nvSpPr>
         <p:spPr>
           <a:xfrm>
-            <a:off x="685800" y="1801368"/>
-            <a:ext cx="2293544" cy="914400"/>
+            <a:off x="548640" y="1737360"/>
+            <a:ext cx="566928" cy="566928"/>
           </a:xfrm>
           <a:prstGeom prst="rect">
             <a:avLst/>
@@ -17680,30 +18100,30 @@
               <a:buNone/>
             </a:pPr>
             <a:r>
-              <a:rPr lang="en-US" sz="4400" b="1" dirty="0">
-                <a:solidFill>
-                  <a:schemeClr val="accent1"/>
-                </a:solidFill>
-                <a:latin typeface="Cambria" pitchFamily="34" charset="0"/>
-                <a:ea typeface="Cambria" pitchFamily="34" charset="-122"/>
-                <a:cs typeface="Cambria" pitchFamily="34" charset="-120"/>
-              </a:rPr>
-              <a:t>69</a:t>
-            </a:r>
-            <a:endParaRPr lang="en-US" sz="4400" dirty="0"/>
-          </a:p>
-        </p:txBody>
-      </p:sp>
-      <p:sp>
-        <p:nvSpPr>
-          <p:cNvPr id="7" name="Stat label"/>
+              <a:rPr lang="en-US" sz="1500" b="1" dirty="0">
+                <a:solidFill>
+                  <a:schemeClr val="bg1"/>
+                </a:solidFill>
+                <a:latin typeface="Calibri" pitchFamily="34" charset="0"/>
+                <a:ea typeface="Calibri" pitchFamily="34" charset="-122"/>
+                <a:cs typeface="Calibri" pitchFamily="34" charset="-120"/>
+              </a:rPr>
+              <a:t>1</a:t>
+            </a:r>
+            <a:endParaRPr lang="en-US" sz="1500" dirty="0"/>
+          </a:p>
+        </p:txBody>
+      </p:sp>
+      <p:sp>
+        <p:nvSpPr>
+          <p:cNvPr id="7" name="Row text"/>
           <p:cNvSpPr txBox="1"/>
           <p:nvPr/>
         </p:nvSpPr>
         <p:spPr>
           <a:xfrm>
-            <a:off x="685800" y="2697480"/>
-            <a:ext cx="2293544" cy="612648"/>
+            <a:off x="1325880" y="1691640"/>
+            <a:ext cx="10317175" cy="841248"/>
           </a:xfrm>
           <a:prstGeom prst="rect">
             <a:avLst/>
@@ -17712,46 +18132,44 @@
           <a:ln/>
         </p:spPr>
         <p:txBody>
-          <a:bodyPr wrap="square" lIns="0" tIns="0" rIns="0" bIns="0" rtlCol="0" anchor="t"/>
-          <a:lstStyle/>
-          <a:p>
-            <a:pPr algn="ctr" indent="0" marL="0">
+          <a:bodyPr wrap="square" lIns="0" tIns="0" rIns="0" bIns="0" rtlCol="0" anchor="ctr"/>
+          <a:lstStyle/>
+          <a:p>
+            <a:pPr indent="0" marL="0">
               <a:buNone/>
             </a:pPr>
             <a:r>
-              <a:rPr lang="en-US" sz="1400" dirty="0">
-                <a:solidFill>
-                  <a:schemeClr val="bg2"/>
-                </a:solidFill>
-              </a:rPr>
-              <a:t>notebook checkpoints, every one PASS</a:t>
-            </a:r>
-            <a:endParaRPr lang="en-US" sz="1400" dirty="0"/>
-          </a:p>
-        </p:txBody>
-      </p:sp>
-      <p:sp>
-        <p:nvSpPr>
-          <p:cNvPr id="8" name="Stat card"/>
+              <a:rPr lang="en-US" sz="1500" dirty="0">
+                <a:solidFill>
+                  <a:schemeClr val="tx1"/>
+                </a:solidFill>
+              </a:rPr>
+              <a:t>Beyond convexity the questions stay and the guarantees go: several local maxima, KKT points that are saddles, prices that hold only nearby, and gaps that no price list closes.</a:t>
+            </a:r>
+            <a:endParaRPr lang="en-US" sz="1500" dirty="0"/>
+          </a:p>
+        </p:txBody>
+      </p:sp>
+      <p:sp>
+        <p:nvSpPr>
+          <p:cNvPr id="8" name="Number"/>
           <p:cNvSpPr/>
           <p:nvPr/>
         </p:nvSpPr>
         <p:spPr>
           <a:xfrm>
-            <a:off x="3390824" y="1691640"/>
-            <a:ext cx="2567864" cy="1691640"/>
-          </a:xfrm>
-          <a:prstGeom prst="roundRect">
-            <a:avLst>
-              <a:gd name="adj" fmla="val 4324"/>
-            </a:avLst>
+            <a:off x="548640" y="2633472"/>
+            <a:ext cx="566928" cy="566928"/>
+          </a:xfrm>
+          <a:prstGeom prst="ellipse">
+            <a:avLst/>
           </a:prstGeom>
           <a:solidFill>
-            <a:schemeClr val="bg2"/>
+            <a:schemeClr val="accent1"/>
           </a:solidFill>
-          <a:ln w="9525">
+          <a:ln w="6350">
             <a:solidFill>
-              <a:srgbClr val="C4CBD8"/>
+              <a:schemeClr val="accent1"/>
             </a:solidFill>
             <a:prstDash val="solid"/>
           </a:ln>
@@ -17759,14 +18177,14 @@
       </p:sp>
       <p:sp>
         <p:nvSpPr>
-          <p:cNvPr id="9" name="Stat value"/>
+          <p:cNvPr id="9" name="Text 6"/>
           <p:cNvSpPr txBox="1"/>
           <p:nvPr/>
         </p:nvSpPr>
         <p:spPr>
           <a:xfrm>
-            <a:off x="3527984" y="1801368"/>
-            <a:ext cx="2293544" cy="914400"/>
+            <a:off x="548640" y="2633472"/>
+            <a:ext cx="566928" cy="566928"/>
           </a:xfrm>
           <a:prstGeom prst="rect">
             <a:avLst/>
@@ -17782,30 +18200,30 @@
               <a:buNone/>
             </a:pPr>
             <a:r>
-              <a:rPr lang="en-US" sz="4400" b="1" dirty="0">
-                <a:solidFill>
-                  <a:schemeClr val="tx1"/>
-                </a:solidFill>
-                <a:latin typeface="Cambria" pitchFamily="34" charset="0"/>
-                <a:ea typeface="Cambria" pitchFamily="34" charset="-122"/>
-                <a:cs typeface="Cambria" pitchFamily="34" charset="-120"/>
-              </a:rPr>
-              <a:t>61</a:t>
-            </a:r>
-            <a:endParaRPr lang="en-US" sz="4400" dirty="0"/>
-          </a:p>
-        </p:txBody>
-      </p:sp>
-      <p:sp>
-        <p:nvSpPr>
-          <p:cNvPr id="10" name="Stat label"/>
+              <a:rPr lang="en-US" sz="1500" b="1" dirty="0">
+                <a:solidFill>
+                  <a:schemeClr val="bg1"/>
+                </a:solidFill>
+                <a:latin typeface="Calibri" pitchFamily="34" charset="0"/>
+                <a:ea typeface="Calibri" pitchFamily="34" charset="-122"/>
+                <a:cs typeface="Calibri" pitchFamily="34" charset="-120"/>
+              </a:rPr>
+              <a:t>2</a:t>
+            </a:r>
+            <a:endParaRPr lang="en-US" sz="1500" dirty="0"/>
+          </a:p>
+        </p:txBody>
+      </p:sp>
+      <p:sp>
+        <p:nvSpPr>
+          <p:cNvPr id="10" name="Row text"/>
           <p:cNvSpPr txBox="1"/>
           <p:nvPr/>
         </p:nvSpPr>
         <p:spPr>
           <a:xfrm>
-            <a:off x="3527984" y="2697480"/>
-            <a:ext cx="2293544" cy="612648"/>
+            <a:off x="1325880" y="2587752"/>
+            <a:ext cx="10317175" cy="841248"/>
           </a:xfrm>
           <a:prstGeom prst="rect">
             <a:avLst/>
@@ -17814,46 +18232,44 @@
           <a:ln/>
         </p:spPr>
         <p:txBody>
-          <a:bodyPr wrap="square" lIns="0" tIns="0" rIns="0" bIns="0" rtlCol="0" anchor="t"/>
-          <a:lstStyle/>
-          <a:p>
-            <a:pPr algn="ctr" indent="0" marL="0">
+          <a:bodyPr wrap="square" lIns="0" tIns="0" rIns="0" bIns="0" rtlCol="0" anchor="ctr"/>
+          <a:lstStyle/>
+          <a:p>
+            <a:pPr indent="0" marL="0">
               <a:buNone/>
             </a:pPr>
             <a:r>
-              <a:rPr lang="en-US" sz="1400" dirty="0">
-                <a:solidFill>
-                  <a:schemeClr val="tx2"/>
-                </a:solidFill>
-              </a:rPr>
-              <a:t>workbook checks against the engine, ALL PASS</a:t>
-            </a:r>
-            <a:endParaRPr lang="en-US" sz="1400" dirty="0"/>
-          </a:p>
-        </p:txBody>
-      </p:sp>
-      <p:sp>
-        <p:nvSpPr>
-          <p:cNvPr id="11" name="Stat card"/>
+              <a:rPr lang="en-US" sz="1500" dirty="0">
+                <a:solidFill>
+                  <a:schemeClr val="tx1"/>
+                </a:solidFill>
+              </a:rPr>
+              <a:t>A local answer is audited in two steps, first order and second order; the audit proves a plan best among its neighbors, never overall.</a:t>
+            </a:r>
+            <a:endParaRPr lang="en-US" sz="1500" dirty="0"/>
+          </a:p>
+        </p:txBody>
+      </p:sp>
+      <p:sp>
+        <p:nvSpPr>
+          <p:cNvPr id="11" name="Number"/>
           <p:cNvSpPr/>
           <p:nvPr/>
         </p:nvSpPr>
         <p:spPr>
           <a:xfrm>
-            <a:off x="6233008" y="1691640"/>
-            <a:ext cx="2567864" cy="1691640"/>
-          </a:xfrm>
-          <a:prstGeom prst="roundRect">
-            <a:avLst>
-              <a:gd name="adj" fmla="val 4324"/>
-            </a:avLst>
+            <a:off x="548640" y="3529584"/>
+            <a:ext cx="566928" cy="566928"/>
+          </a:xfrm>
+          <a:prstGeom prst="ellipse">
+            <a:avLst/>
           </a:prstGeom>
           <a:solidFill>
-            <a:schemeClr val="bg2"/>
+            <a:schemeClr val="accent1"/>
           </a:solidFill>
-          <a:ln w="9525">
+          <a:ln w="6350">
             <a:solidFill>
-              <a:srgbClr val="C4CBD8"/>
+              <a:schemeClr val="accent1"/>
             </a:solidFill>
             <a:prstDash val="solid"/>
           </a:ln>
@@ -17861,14 +18277,14 @@
       </p:sp>
       <p:sp>
         <p:nvSpPr>
-          <p:cNvPr id="12" name="Stat value"/>
+          <p:cNvPr id="12" name="Text 9"/>
           <p:cNvSpPr txBox="1"/>
           <p:nvPr/>
         </p:nvSpPr>
         <p:spPr>
           <a:xfrm>
-            <a:off x="6370168" y="1801368"/>
-            <a:ext cx="2293544" cy="914400"/>
+            <a:off x="548640" y="3529584"/>
+            <a:ext cx="566928" cy="566928"/>
           </a:xfrm>
           <a:prstGeom prst="rect">
             <a:avLst/>
@@ -17884,30 +18300,30 @@
               <a:buNone/>
             </a:pPr>
             <a:r>
-              <a:rPr lang="en-US" sz="4400" b="1" dirty="0">
-                <a:solidFill>
-                  <a:schemeClr val="tx1"/>
-                </a:solidFill>
-                <a:latin typeface="Cambria" pitchFamily="34" charset="0"/>
-                <a:ea typeface="Cambria" pitchFamily="34" charset="-122"/>
-                <a:cs typeface="Cambria" pitchFamily="34" charset="-120"/>
-              </a:rPr>
-              <a:t>26204</a:t>
-            </a:r>
-            <a:endParaRPr lang="en-US" sz="4400" dirty="0"/>
-          </a:p>
-        </p:txBody>
-      </p:sp>
-      <p:sp>
-        <p:nvSpPr>
-          <p:cNvPr id="13" name="Stat label"/>
+              <a:rPr lang="en-US" sz="1500" b="1" dirty="0">
+                <a:solidFill>
+                  <a:schemeClr val="bg1"/>
+                </a:solidFill>
+                <a:latin typeface="Calibri" pitchFamily="34" charset="0"/>
+                <a:ea typeface="Calibri" pitchFamily="34" charset="-122"/>
+                <a:cs typeface="Calibri" pitchFamily="34" charset="-120"/>
+              </a:rPr>
+              <a:t>3</a:t>
+            </a:r>
+            <a:endParaRPr lang="en-US" sz="1500" dirty="0"/>
+          </a:p>
+        </p:txBody>
+      </p:sp>
+      <p:sp>
+        <p:nvSpPr>
+          <p:cNvPr id="13" name="Row text"/>
           <p:cNvSpPr txBox="1"/>
           <p:nvPr/>
         </p:nvSpPr>
         <p:spPr>
           <a:xfrm>
-            <a:off x="6370168" y="2697480"/>
-            <a:ext cx="2293544" cy="612648"/>
+            <a:off x="1325880" y="3483864"/>
+            <a:ext cx="10317175" cy="841248"/>
           </a:xfrm>
           <a:prstGeom prst="rect">
             <a:avLst/>
@@ -17916,46 +18332,44 @@
           <a:ln/>
         </p:spPr>
         <p:txBody>
-          <a:bodyPr wrap="square" lIns="0" tIns="0" rIns="0" bIns="0" rtlCol="0" anchor="t"/>
-          <a:lstStyle/>
-          <a:p>
-            <a:pPr algn="ctr" indent="0" marL="0">
+          <a:bodyPr wrap="square" lIns="0" tIns="0" rIns="0" bIns="0" rtlCol="0" anchor="ctr"/>
+          <a:lstStyle/>
+          <a:p>
+            <a:pPr indent="0" marL="0">
               <a:buNone/>
             </a:pPr>
             <a:r>
-              <a:rPr lang="en-US" sz="1400" dirty="0">
-                <a:solidFill>
-                  <a:schemeClr val="tx2"/>
-                </a:solidFill>
-              </a:rPr>
-              <a:t>the lab's seed</a:t>
-            </a:r>
-            <a:endParaRPr lang="en-US" sz="1400" dirty="0"/>
-          </a:p>
-        </p:txBody>
-      </p:sp>
-      <p:sp>
-        <p:nvSpPr>
-          <p:cNvPr id="14" name="Stat card"/>
+              <a:rPr lang="en-US" sz="1500" dirty="0">
+                <a:solidFill>
+                  <a:schemeClr val="tx1"/>
+                </a:solidFill>
+              </a:rPr>
+              <a:t>Multipliers exist under a constraint qualification and are local prices: under the second-order certificate and strict complementarity plans and prices move smoothly, and where local values cross the best plan jumps.</a:t>
+            </a:r>
+            <a:endParaRPr lang="en-US" sz="1500" dirty="0"/>
+          </a:p>
+        </p:txBody>
+      </p:sp>
+      <p:sp>
+        <p:nvSpPr>
+          <p:cNvPr id="14" name="Number"/>
           <p:cNvSpPr/>
           <p:nvPr/>
         </p:nvSpPr>
         <p:spPr>
           <a:xfrm>
-            <a:off x="9075191" y="1691640"/>
-            <a:ext cx="2567864" cy="1691640"/>
-          </a:xfrm>
-          <a:prstGeom prst="roundRect">
-            <a:avLst>
-              <a:gd name="adj" fmla="val 4324"/>
-            </a:avLst>
+            <a:off x="548640" y="4425696"/>
+            <a:ext cx="566928" cy="566928"/>
+          </a:xfrm>
+          <a:prstGeom prst="ellipse">
+            <a:avLst/>
           </a:prstGeom>
           <a:solidFill>
-            <a:schemeClr val="bg2"/>
+            <a:schemeClr val="accent1"/>
           </a:solidFill>
-          <a:ln w="9525">
+          <a:ln w="6350">
             <a:solidFill>
-              <a:srgbClr val="C4CBD8"/>
+              <a:schemeClr val="accent1"/>
             </a:solidFill>
             <a:prstDash val="solid"/>
           </a:ln>
@@ -17963,14 +18377,14 @@
       </p:sp>
       <p:sp>
         <p:nvSpPr>
-          <p:cNvPr id="15" name="Stat value"/>
+          <p:cNvPr id="15" name="Text 12"/>
           <p:cNvSpPr txBox="1"/>
           <p:nvPr/>
         </p:nvSpPr>
         <p:spPr>
           <a:xfrm>
-            <a:off x="9212351" y="1801368"/>
-            <a:ext cx="2293544" cy="914400"/>
+            <a:off x="548640" y="4425696"/>
+            <a:ext cx="566928" cy="566928"/>
           </a:xfrm>
           <a:prstGeom prst="rect">
             <a:avLst/>
@@ -17986,30 +18400,30 @@
               <a:buNone/>
             </a:pPr>
             <a:r>
-              <a:rPr lang="en-US" sz="3000" b="1" dirty="0">
-                <a:solidFill>
-                  <a:schemeClr val="tx1"/>
-                </a:solidFill>
-                <a:latin typeface="Cambria" pitchFamily="34" charset="0"/>
-                <a:ea typeface="Cambria" pitchFamily="34" charset="-122"/>
-                <a:cs typeface="Cambria" pitchFamily="34" charset="-120"/>
-              </a:rPr>
-              <a:t>AXIOM-04</a:t>
-            </a:r>
-            <a:endParaRPr lang="en-US" sz="3000" dirty="0"/>
-          </a:p>
-        </p:txBody>
-      </p:sp>
-      <p:sp>
-        <p:nvSpPr>
-          <p:cNvPr id="16" name="Stat label"/>
+              <a:rPr lang="en-US" sz="1500" b="1" dirty="0">
+                <a:solidFill>
+                  <a:schemeClr val="bg1"/>
+                </a:solidFill>
+                <a:latin typeface="Calibri" pitchFamily="34" charset="0"/>
+                <a:ea typeface="Calibri" pitchFamily="34" charset="-122"/>
+                <a:cs typeface="Calibri" pitchFamily="34" charset="-120"/>
+              </a:rPr>
+              <a:t>4</a:t>
+            </a:r>
+            <a:endParaRPr lang="en-US" sz="1500" dirty="0"/>
+          </a:p>
+        </p:txBody>
+      </p:sp>
+      <p:sp>
+        <p:nvSpPr>
+          <p:cNvPr id="16" name="Row text"/>
           <p:cNvSpPr txBox="1"/>
           <p:nvPr/>
         </p:nvSpPr>
         <p:spPr>
           <a:xfrm>
-            <a:off x="9212351" y="2697480"/>
-            <a:ext cx="2293544" cy="612648"/>
+            <a:off x="1325880" y="4379976"/>
+            <a:ext cx="10317175" cy="841248"/>
           </a:xfrm>
           <a:prstGeom prst="rect">
             <a:avLst/>
@@ -18018,34 +18432,98 @@
           <a:ln/>
         </p:spPr>
         <p:txBody>
-          <a:bodyPr wrap="square" lIns="0" tIns="0" rIns="0" bIns="0" rtlCol="0" anchor="t"/>
+          <a:bodyPr wrap="square" lIns="0" tIns="0" rIns="0" bIns="0" rtlCol="0" anchor="ctr"/>
+          <a:lstStyle/>
+          <a:p>
+            <a:pPr indent="0" marL="0">
+              <a:buNone/>
+            </a:pPr>
+            <a:r>
+              <a:rPr lang="en-US" sz="1500" dirty="0">
+                <a:solidFill>
+                  <a:schemeClr val="tx1"/>
+                </a:solidFill>
+              </a:rPr>
+              <a:t>Search from many starts, report the inventory, and bound it: a convex relaxation or a price list bounds what no start reached, and when decisions multiply, part measures never pay.</a:t>
+            </a:r>
+            <a:endParaRPr lang="en-US" sz="1500" dirty="0"/>
+          </a:p>
+        </p:txBody>
+      </p:sp>
+      <p:sp>
+        <p:nvSpPr>
+          <p:cNvPr id="17" name="Number"/>
+          <p:cNvSpPr/>
+          <p:nvPr/>
+        </p:nvSpPr>
+        <p:spPr>
+          <a:xfrm>
+            <a:off x="548640" y="5321808"/>
+            <a:ext cx="566928" cy="566928"/>
+          </a:xfrm>
+          <a:prstGeom prst="ellipse">
+            <a:avLst/>
+          </a:prstGeom>
+          <a:solidFill>
+            <a:schemeClr val="accent1"/>
+          </a:solidFill>
+          <a:ln w="6350">
+            <a:solidFill>
+              <a:schemeClr val="accent1"/>
+            </a:solidFill>
+            <a:prstDash val="solid"/>
+          </a:ln>
+        </p:spPr>
+      </p:sp>
+      <p:sp>
+        <p:nvSpPr>
+          <p:cNvPr id="18" name="Text 15"/>
+          <p:cNvSpPr txBox="1"/>
+          <p:nvPr/>
+        </p:nvSpPr>
+        <p:spPr>
+          <a:xfrm>
+            <a:off x="548640" y="5321808"/>
+            <a:ext cx="566928" cy="566928"/>
+          </a:xfrm>
+          <a:prstGeom prst="rect">
+            <a:avLst/>
+          </a:prstGeom>
+          <a:noFill/>
+          <a:ln/>
+        </p:spPr>
+        <p:txBody>
+          <a:bodyPr wrap="square" lIns="0" tIns="0" rIns="0" bIns="0" rtlCol="0" anchor="ctr"/>
           <a:lstStyle/>
           <a:p>
             <a:pPr algn="ctr" indent="0" marL="0">
               <a:buNone/>
             </a:pPr>
             <a:r>
-              <a:rPr lang="en-US" sz="1400" dirty="0">
-                <a:solidFill>
-                  <a:schemeClr val="tx2"/>
-                </a:solidFill>
-              </a:rPr>
-              <a:t>AXIOM Lab 2.4</a:t>
-            </a:r>
-            <a:endParaRPr lang="en-US" sz="1400" dirty="0"/>
-          </a:p>
-        </p:txBody>
-      </p:sp>
-      <p:sp>
-        <p:nvSpPr>
-          <p:cNvPr id="17" name="Bullets"/>
+              <a:rPr lang="en-US" sz="1500" b="1" dirty="0">
+                <a:solidFill>
+                  <a:schemeClr val="bg1"/>
+                </a:solidFill>
+                <a:latin typeface="Calibri" pitchFamily="34" charset="0"/>
+                <a:ea typeface="Calibri" pitchFamily="34" charset="-122"/>
+                <a:cs typeface="Calibri" pitchFamily="34" charset="-120"/>
+              </a:rPr>
+              <a:t>5</a:t>
+            </a:r>
+            <a:endParaRPr lang="en-US" sz="1500" dirty="0"/>
+          </a:p>
+        </p:txBody>
+      </p:sp>
+      <p:sp>
+        <p:nvSpPr>
+          <p:cNvPr id="19" name="Row text"/>
           <p:cNvSpPr txBox="1"/>
           <p:nvPr/>
         </p:nvSpPr>
         <p:spPr>
           <a:xfrm>
-            <a:off x="548640" y="3703320"/>
-            <a:ext cx="11094415" cy="2468880"/>
+            <a:off x="1325880" y="5276088"/>
+            <a:ext cx="10317175" cy="841248"/>
           </a:xfrm>
           <a:prstGeom prst="rect">
             <a:avLst/>
@@ -18054,77 +18532,21 @@
           <a:ln/>
         </p:spPr>
         <p:txBody>
-          <a:bodyPr wrap="square" lIns="635" tIns="635" rIns="635" bIns="635" rtlCol="0" anchor="t"/>
-          <a:lstStyle/>
-          <a:p>
-            <a:pPr marL="228600" indent="-228600">
-              <a:spcAft>
-                <a:spcPts val="800"/>
-              </a:spcAft>
-              <a:buSzPct val="100000"/>
-              <a:buChar char="•"/>
-            </a:pPr>
-            <a:r>
-              <a:rPr lang="en-US" sz="1700" b="1" dirty="0">
+          <a:bodyPr wrap="square" lIns="0" tIns="0" rIns="0" bIns="0" rtlCol="0" anchor="ctr"/>
+          <a:lstStyle/>
+          <a:p>
+            <a:pPr indent="0" marL="0">
+              <a:buNone/>
+            </a:pPr>
+            <a:r>
+              <a:rPr lang="en-US" sz="1500" dirty="0">
                 <a:solidFill>
                   <a:schemeClr val="tx1"/>
                 </a:solidFill>
               </a:rPr>
-              <a:t>Notebook</a:t>
-            </a:r>
-            <a:r>
-              <a:rPr lang="en-US" sz="1700" dirty="0">
-                <a:solidFill>
-                  <a:schemeClr val="tx1"/>
-                </a:solidFill>
-              </a:rPr>
-              <a:t> DCT_V2_Ch04_Lab.ipynb: Worked Example 4.1 and the lab's five steps in ten panels, with the $60m cap and the package, ready for Colab</a:t>
-            </a:r>
-            <a:endParaRPr lang="en-US" sz="1700" dirty="0"/>
-          </a:p>
-          <a:p>
-            <a:pPr marL="228600" indent="-228600">
-              <a:spcAft>
-                <a:spcPts val="800"/>
-              </a:spcAft>
-              <a:buSzPct val="100000"/>
-              <a:buChar char="•"/>
-            </a:pPr>
-            <a:r>
-              <a:rPr lang="en-US" sz="1700" b="1" dirty="0">
-                <a:solidFill>
-                  <a:schemeClr val="tx1"/>
-                </a:solidFill>
-              </a:rPr>
-              <a:t>Workbook</a:t>
-            </a:r>
-            <a:r>
-              <a:rPr lang="en-US" sz="1700" dirty="0">
-                <a:solidFill>
-                  <a:schemeClr val="tx1"/>
-                </a:solidFill>
-              </a:rPr>
-              <a:t> DCT_V2_Ch04_Lab.xlsx: the partial-round model, the 64 plans, the saddle, the audit, the relaxation and every node of both trees, in formulas</a:t>
-            </a:r>
-            <a:endParaRPr lang="en-US" sz="1700" dirty="0"/>
-          </a:p>
-          <a:p>
-            <a:pPr marL="228600" indent="-228600">
-              <a:spcAft>
-                <a:spcPts val="800"/>
-              </a:spcAft>
-              <a:buSzPct val="100000"/>
-              <a:buChar char="•"/>
-            </a:pPr>
-            <a:r>
-              <a:rPr lang="en-US" sz="1700" dirty="0">
-                <a:solidFill>
-                  <a:schemeClr val="tx1"/>
-                </a:solidFill>
-              </a:rPr>
-              <a:t>Every number on these slides is the book's, and both companions check it</a:t>
-            </a:r>
-            <a:endParaRPr lang="en-US" sz="1700" dirty="0"/>
+              <a:t>Lumpy decisions are formulated with binaries and true ranges and solved by branch-and-bound, which certifies a gap at every stage; cutting planes and decomposition scale it, and five convex solves prove Meridian's four-round plan best.</a:t>
+            </a:r>
+            <a:endParaRPr lang="en-US" sz="1500" dirty="0"/>
           </a:p>
         </p:txBody>
       </p:sp>
@@ -18230,6 +18652,655 @@
                   <a:schemeClr val="accent1"/>
                 </a:solidFill>
               </a:rPr>
+              <a:t>THIS WEEK'S LABORATORY</a:t>
+            </a:r>
+            <a:endParaRPr lang="en-US" sz="1200" dirty="0"/>
+          </a:p>
+        </p:txBody>
+      </p:sp>
+      <p:sp>
+        <p:nvSpPr>
+          <p:cNvPr id="4" name="Text 1"/>
+          <p:cNvSpPr/>
+          <p:nvPr>
+            <p:ph idx="103" type="title" hasCustomPrompt="1"/>
+          </p:nvPr>
+        </p:nvSpPr>
+        <p:spPr>
+          <a:xfrm>
+            <a:off x="548640" y="658368"/>
+            <a:ext cx="11094415" cy="868680"/>
+          </a:xfrm>
+          <a:prstGeom prst="rect">
+            <a:avLst/>
+          </a:prstGeom>
+          <a:noFill/>
+          <a:ln/>
+        </p:spPr>
+        <p:txBody>
+          <a:bodyPr wrap="square" lIns="0" tIns="0" rIns="0" bIns="0" rtlCol="0" anchor="t"/>
+          <a:lstStyle/>
+          <a:p>
+            <a:pPr algn="l" indent="0" marL="0">
+              <a:buNone/>
+            </a:pPr>
+            <a:r>
+              <a:rPr lang="en-US" sz="3200" b="1" dirty="0">
+                <a:solidFill>
+                  <a:schemeClr val="tx1"/>
+                </a:solidFill>
+                <a:latin typeface="Cambria" pitchFamily="34" charset="0"/>
+                <a:ea typeface="Cambria" pitchFamily="34" charset="-122"/>
+                <a:cs typeface="Cambria" pitchFamily="34" charset="-120"/>
+              </a:rPr>
+              <a:t>Notebook and workbook reproduce the book</a:t>
+            </a:r>
+            <a:endParaRPr lang="en-US" sz="3200" dirty="0"/>
+          </a:p>
+        </p:txBody>
+      </p:sp>
+      <p:sp>
+        <p:nvSpPr>
+          <p:cNvPr id="5" name="Stat card"/>
+          <p:cNvSpPr/>
+          <p:nvPr/>
+        </p:nvSpPr>
+        <p:spPr>
+          <a:xfrm>
+            <a:off x="548640" y="1691640"/>
+            <a:ext cx="2567864" cy="1691640"/>
+          </a:xfrm>
+          <a:prstGeom prst="roundRect">
+            <a:avLst>
+              <a:gd name="adj" fmla="val 4324"/>
+            </a:avLst>
+          </a:prstGeom>
+          <a:solidFill>
+            <a:schemeClr val="tx1"/>
+          </a:solidFill>
+          <a:ln w="9525">
+            <a:solidFill>
+              <a:srgbClr val="0F1E3D"/>
+            </a:solidFill>
+            <a:prstDash val="solid"/>
+          </a:ln>
+        </p:spPr>
+      </p:sp>
+      <p:sp>
+        <p:nvSpPr>
+          <p:cNvPr id="6" name="Stat value"/>
+          <p:cNvSpPr txBox="1"/>
+          <p:nvPr/>
+        </p:nvSpPr>
+        <p:spPr>
+          <a:xfrm>
+            <a:off x="685800" y="1801368"/>
+            <a:ext cx="2293544" cy="914400"/>
+          </a:xfrm>
+          <a:prstGeom prst="rect">
+            <a:avLst/>
+          </a:prstGeom>
+          <a:noFill/>
+          <a:ln/>
+        </p:spPr>
+        <p:txBody>
+          <a:bodyPr wrap="square" lIns="0" tIns="0" rIns="0" bIns="0" rtlCol="0" anchor="ctr"/>
+          <a:lstStyle/>
+          <a:p>
+            <a:pPr algn="ctr" indent="0" marL="0">
+              <a:buNone/>
+            </a:pPr>
+            <a:r>
+              <a:rPr lang="en-US" sz="4400" b="1" dirty="0">
+                <a:solidFill>
+                  <a:schemeClr val="accent1"/>
+                </a:solidFill>
+                <a:latin typeface="Cambria" pitchFamily="34" charset="0"/>
+                <a:ea typeface="Cambria" pitchFamily="34" charset="-122"/>
+                <a:cs typeface="Cambria" pitchFamily="34" charset="-120"/>
+              </a:rPr>
+              <a:t>69</a:t>
+            </a:r>
+            <a:endParaRPr lang="en-US" sz="4400" dirty="0"/>
+          </a:p>
+        </p:txBody>
+      </p:sp>
+      <p:sp>
+        <p:nvSpPr>
+          <p:cNvPr id="7" name="Stat label"/>
+          <p:cNvSpPr txBox="1"/>
+          <p:nvPr/>
+        </p:nvSpPr>
+        <p:spPr>
+          <a:xfrm>
+            <a:off x="685800" y="2697480"/>
+            <a:ext cx="2293544" cy="612648"/>
+          </a:xfrm>
+          <a:prstGeom prst="rect">
+            <a:avLst/>
+          </a:prstGeom>
+          <a:noFill/>
+          <a:ln/>
+        </p:spPr>
+        <p:txBody>
+          <a:bodyPr wrap="square" lIns="0" tIns="0" rIns="0" bIns="0" rtlCol="0" anchor="t"/>
+          <a:lstStyle/>
+          <a:p>
+            <a:pPr algn="ctr" indent="0" marL="0">
+              <a:buNone/>
+            </a:pPr>
+            <a:r>
+              <a:rPr lang="en-US" sz="1400" dirty="0">
+                <a:solidFill>
+                  <a:schemeClr val="bg2"/>
+                </a:solidFill>
+              </a:rPr>
+              <a:t>notebook checkpoints, every one PASS</a:t>
+            </a:r>
+            <a:endParaRPr lang="en-US" sz="1400" dirty="0"/>
+          </a:p>
+        </p:txBody>
+      </p:sp>
+      <p:sp>
+        <p:nvSpPr>
+          <p:cNvPr id="8" name="Stat card"/>
+          <p:cNvSpPr/>
+          <p:nvPr/>
+        </p:nvSpPr>
+        <p:spPr>
+          <a:xfrm>
+            <a:off x="3390824" y="1691640"/>
+            <a:ext cx="2567864" cy="1691640"/>
+          </a:xfrm>
+          <a:prstGeom prst="roundRect">
+            <a:avLst>
+              <a:gd name="adj" fmla="val 4324"/>
+            </a:avLst>
+          </a:prstGeom>
+          <a:solidFill>
+            <a:schemeClr val="bg2"/>
+          </a:solidFill>
+          <a:ln w="9525">
+            <a:solidFill>
+              <a:srgbClr val="C4CBD8"/>
+            </a:solidFill>
+            <a:prstDash val="solid"/>
+          </a:ln>
+        </p:spPr>
+      </p:sp>
+      <p:sp>
+        <p:nvSpPr>
+          <p:cNvPr id="9" name="Stat value"/>
+          <p:cNvSpPr txBox="1"/>
+          <p:nvPr/>
+        </p:nvSpPr>
+        <p:spPr>
+          <a:xfrm>
+            <a:off x="3527984" y="1801368"/>
+            <a:ext cx="2293544" cy="914400"/>
+          </a:xfrm>
+          <a:prstGeom prst="rect">
+            <a:avLst/>
+          </a:prstGeom>
+          <a:noFill/>
+          <a:ln/>
+        </p:spPr>
+        <p:txBody>
+          <a:bodyPr wrap="square" lIns="0" tIns="0" rIns="0" bIns="0" rtlCol="0" anchor="ctr"/>
+          <a:lstStyle/>
+          <a:p>
+            <a:pPr algn="ctr" indent="0" marL="0">
+              <a:buNone/>
+            </a:pPr>
+            <a:r>
+              <a:rPr lang="en-US" sz="4400" b="1" dirty="0">
+                <a:solidFill>
+                  <a:schemeClr val="tx1"/>
+                </a:solidFill>
+                <a:latin typeface="Cambria" pitchFamily="34" charset="0"/>
+                <a:ea typeface="Cambria" pitchFamily="34" charset="-122"/>
+                <a:cs typeface="Cambria" pitchFamily="34" charset="-120"/>
+              </a:rPr>
+              <a:t>61</a:t>
+            </a:r>
+            <a:endParaRPr lang="en-US" sz="4400" dirty="0"/>
+          </a:p>
+        </p:txBody>
+      </p:sp>
+      <p:sp>
+        <p:nvSpPr>
+          <p:cNvPr id="10" name="Stat label"/>
+          <p:cNvSpPr txBox="1"/>
+          <p:nvPr/>
+        </p:nvSpPr>
+        <p:spPr>
+          <a:xfrm>
+            <a:off x="3527984" y="2697480"/>
+            <a:ext cx="2293544" cy="612648"/>
+          </a:xfrm>
+          <a:prstGeom prst="rect">
+            <a:avLst/>
+          </a:prstGeom>
+          <a:noFill/>
+          <a:ln/>
+        </p:spPr>
+        <p:txBody>
+          <a:bodyPr wrap="square" lIns="0" tIns="0" rIns="0" bIns="0" rtlCol="0" anchor="t"/>
+          <a:lstStyle/>
+          <a:p>
+            <a:pPr algn="ctr" indent="0" marL="0">
+              <a:buNone/>
+            </a:pPr>
+            <a:r>
+              <a:rPr lang="en-US" sz="1400" dirty="0">
+                <a:solidFill>
+                  <a:schemeClr val="tx2"/>
+                </a:solidFill>
+              </a:rPr>
+              <a:t>workbook checks against the engine, ALL PASS</a:t>
+            </a:r>
+            <a:endParaRPr lang="en-US" sz="1400" dirty="0"/>
+          </a:p>
+        </p:txBody>
+      </p:sp>
+      <p:sp>
+        <p:nvSpPr>
+          <p:cNvPr id="11" name="Stat card"/>
+          <p:cNvSpPr/>
+          <p:nvPr/>
+        </p:nvSpPr>
+        <p:spPr>
+          <a:xfrm>
+            <a:off x="6233008" y="1691640"/>
+            <a:ext cx="2567864" cy="1691640"/>
+          </a:xfrm>
+          <a:prstGeom prst="roundRect">
+            <a:avLst>
+              <a:gd name="adj" fmla="val 4324"/>
+            </a:avLst>
+          </a:prstGeom>
+          <a:solidFill>
+            <a:schemeClr val="bg2"/>
+          </a:solidFill>
+          <a:ln w="9525">
+            <a:solidFill>
+              <a:srgbClr val="C4CBD8"/>
+            </a:solidFill>
+            <a:prstDash val="solid"/>
+          </a:ln>
+        </p:spPr>
+      </p:sp>
+      <p:sp>
+        <p:nvSpPr>
+          <p:cNvPr id="12" name="Stat value"/>
+          <p:cNvSpPr txBox="1"/>
+          <p:nvPr/>
+        </p:nvSpPr>
+        <p:spPr>
+          <a:xfrm>
+            <a:off x="6370168" y="1801368"/>
+            <a:ext cx="2293544" cy="914400"/>
+          </a:xfrm>
+          <a:prstGeom prst="rect">
+            <a:avLst/>
+          </a:prstGeom>
+          <a:noFill/>
+          <a:ln/>
+        </p:spPr>
+        <p:txBody>
+          <a:bodyPr wrap="square" lIns="0" tIns="0" rIns="0" bIns="0" rtlCol="0" anchor="ctr"/>
+          <a:lstStyle/>
+          <a:p>
+            <a:pPr algn="ctr" indent="0" marL="0">
+              <a:buNone/>
+            </a:pPr>
+            <a:r>
+              <a:rPr lang="en-US" sz="4400" b="1" dirty="0">
+                <a:solidFill>
+                  <a:schemeClr val="tx1"/>
+                </a:solidFill>
+                <a:latin typeface="Cambria" pitchFamily="34" charset="0"/>
+                <a:ea typeface="Cambria" pitchFamily="34" charset="-122"/>
+                <a:cs typeface="Cambria" pitchFamily="34" charset="-120"/>
+              </a:rPr>
+              <a:t>26204</a:t>
+            </a:r>
+            <a:endParaRPr lang="en-US" sz="4400" dirty="0"/>
+          </a:p>
+        </p:txBody>
+      </p:sp>
+      <p:sp>
+        <p:nvSpPr>
+          <p:cNvPr id="13" name="Stat label"/>
+          <p:cNvSpPr txBox="1"/>
+          <p:nvPr/>
+        </p:nvSpPr>
+        <p:spPr>
+          <a:xfrm>
+            <a:off x="6370168" y="2697480"/>
+            <a:ext cx="2293544" cy="612648"/>
+          </a:xfrm>
+          <a:prstGeom prst="rect">
+            <a:avLst/>
+          </a:prstGeom>
+          <a:noFill/>
+          <a:ln/>
+        </p:spPr>
+        <p:txBody>
+          <a:bodyPr wrap="square" lIns="0" tIns="0" rIns="0" bIns="0" rtlCol="0" anchor="t"/>
+          <a:lstStyle/>
+          <a:p>
+            <a:pPr algn="ctr" indent="0" marL="0">
+              <a:buNone/>
+            </a:pPr>
+            <a:r>
+              <a:rPr lang="en-US" sz="1400" dirty="0">
+                <a:solidFill>
+                  <a:schemeClr val="tx2"/>
+                </a:solidFill>
+              </a:rPr>
+              <a:t>the lab's seed</a:t>
+            </a:r>
+            <a:endParaRPr lang="en-US" sz="1400" dirty="0"/>
+          </a:p>
+        </p:txBody>
+      </p:sp>
+      <p:sp>
+        <p:nvSpPr>
+          <p:cNvPr id="14" name="Stat card"/>
+          <p:cNvSpPr/>
+          <p:nvPr/>
+        </p:nvSpPr>
+        <p:spPr>
+          <a:xfrm>
+            <a:off x="9075191" y="1691640"/>
+            <a:ext cx="2567864" cy="1691640"/>
+          </a:xfrm>
+          <a:prstGeom prst="roundRect">
+            <a:avLst>
+              <a:gd name="adj" fmla="val 4324"/>
+            </a:avLst>
+          </a:prstGeom>
+          <a:solidFill>
+            <a:schemeClr val="bg2"/>
+          </a:solidFill>
+          <a:ln w="9525">
+            <a:solidFill>
+              <a:srgbClr val="C4CBD8"/>
+            </a:solidFill>
+            <a:prstDash val="solid"/>
+          </a:ln>
+        </p:spPr>
+      </p:sp>
+      <p:sp>
+        <p:nvSpPr>
+          <p:cNvPr id="15" name="Stat value"/>
+          <p:cNvSpPr txBox="1"/>
+          <p:nvPr/>
+        </p:nvSpPr>
+        <p:spPr>
+          <a:xfrm>
+            <a:off x="9212351" y="1801368"/>
+            <a:ext cx="2293544" cy="914400"/>
+          </a:xfrm>
+          <a:prstGeom prst="rect">
+            <a:avLst/>
+          </a:prstGeom>
+          <a:noFill/>
+          <a:ln/>
+        </p:spPr>
+        <p:txBody>
+          <a:bodyPr wrap="square" lIns="0" tIns="0" rIns="0" bIns="0" rtlCol="0" anchor="ctr"/>
+          <a:lstStyle/>
+          <a:p>
+            <a:pPr algn="ctr" indent="0" marL="0">
+              <a:buNone/>
+            </a:pPr>
+            <a:r>
+              <a:rPr lang="en-US" sz="3000" b="1" dirty="0">
+                <a:solidFill>
+                  <a:schemeClr val="tx1"/>
+                </a:solidFill>
+                <a:latin typeface="Cambria" pitchFamily="34" charset="0"/>
+                <a:ea typeface="Cambria" pitchFamily="34" charset="-122"/>
+                <a:cs typeface="Cambria" pitchFamily="34" charset="-120"/>
+              </a:rPr>
+              <a:t>AXIOM-04</a:t>
+            </a:r>
+            <a:endParaRPr lang="en-US" sz="3000" dirty="0"/>
+          </a:p>
+        </p:txBody>
+      </p:sp>
+      <p:sp>
+        <p:nvSpPr>
+          <p:cNvPr id="16" name="Stat label"/>
+          <p:cNvSpPr txBox="1"/>
+          <p:nvPr/>
+        </p:nvSpPr>
+        <p:spPr>
+          <a:xfrm>
+            <a:off x="9212351" y="2697480"/>
+            <a:ext cx="2293544" cy="612648"/>
+          </a:xfrm>
+          <a:prstGeom prst="rect">
+            <a:avLst/>
+          </a:prstGeom>
+          <a:noFill/>
+          <a:ln/>
+        </p:spPr>
+        <p:txBody>
+          <a:bodyPr wrap="square" lIns="0" tIns="0" rIns="0" bIns="0" rtlCol="0" anchor="t"/>
+          <a:lstStyle/>
+          <a:p>
+            <a:pPr algn="ctr" indent="0" marL="0">
+              <a:buNone/>
+            </a:pPr>
+            <a:r>
+              <a:rPr lang="en-US" sz="1400" dirty="0">
+                <a:solidFill>
+                  <a:schemeClr val="tx2"/>
+                </a:solidFill>
+              </a:rPr>
+              <a:t>AXIOM Lab 2.4</a:t>
+            </a:r>
+            <a:endParaRPr lang="en-US" sz="1400" dirty="0"/>
+          </a:p>
+        </p:txBody>
+      </p:sp>
+      <p:sp>
+        <p:nvSpPr>
+          <p:cNvPr id="17" name="Bullets"/>
+          <p:cNvSpPr txBox="1"/>
+          <p:nvPr/>
+        </p:nvSpPr>
+        <p:spPr>
+          <a:xfrm>
+            <a:off x="548640" y="3703320"/>
+            <a:ext cx="11094415" cy="2468880"/>
+          </a:xfrm>
+          <a:prstGeom prst="rect">
+            <a:avLst/>
+          </a:prstGeom>
+          <a:noFill/>
+          <a:ln/>
+        </p:spPr>
+        <p:txBody>
+          <a:bodyPr wrap="square" lIns="635" tIns="635" rIns="635" bIns="635" rtlCol="0" anchor="t"/>
+          <a:lstStyle/>
+          <a:p>
+            <a:pPr marL="228600" indent="-228600">
+              <a:spcAft>
+                <a:spcPts val="800"/>
+              </a:spcAft>
+              <a:buSzPct val="100000"/>
+              <a:buChar char="•"/>
+            </a:pPr>
+            <a:r>
+              <a:rPr lang="en-US" sz="1700" b="1" dirty="0">
+                <a:solidFill>
+                  <a:schemeClr val="tx1"/>
+                </a:solidFill>
+              </a:rPr>
+              <a:t>Notebook</a:t>
+            </a:r>
+            <a:r>
+              <a:rPr lang="en-US" sz="1700" dirty="0">
+                <a:solidFill>
+                  <a:schemeClr val="tx1"/>
+                </a:solidFill>
+              </a:rPr>
+              <a:t> DCT_V2_Ch04_Lab.ipynb: Worked Example 4.1 and the lab's five steps in ten panels, with the $60m cap and the package, ready for Colab</a:t>
+            </a:r>
+            <a:endParaRPr lang="en-US" sz="1700" dirty="0"/>
+          </a:p>
+          <a:p>
+            <a:pPr marL="228600" indent="-228600">
+              <a:spcAft>
+                <a:spcPts val="800"/>
+              </a:spcAft>
+              <a:buSzPct val="100000"/>
+              <a:buChar char="•"/>
+            </a:pPr>
+            <a:r>
+              <a:rPr lang="en-US" sz="1700" b="1" dirty="0">
+                <a:solidFill>
+                  <a:schemeClr val="tx1"/>
+                </a:solidFill>
+              </a:rPr>
+              <a:t>Workbook</a:t>
+            </a:r>
+            <a:r>
+              <a:rPr lang="en-US" sz="1700" dirty="0">
+                <a:solidFill>
+                  <a:schemeClr val="tx1"/>
+                </a:solidFill>
+              </a:rPr>
+              <a:t> DCT_V2_Ch04_Lab.xlsx: the partial-round model, the 64 plans, the saddle, the audit, the relaxation and every node of both trees, in formulas</a:t>
+            </a:r>
+            <a:endParaRPr lang="en-US" sz="1700" dirty="0"/>
+          </a:p>
+          <a:p>
+            <a:pPr marL="228600" indent="-228600">
+              <a:spcAft>
+                <a:spcPts val="800"/>
+              </a:spcAft>
+              <a:buSzPct val="100000"/>
+              <a:buChar char="•"/>
+            </a:pPr>
+            <a:r>
+              <a:rPr lang="en-US" sz="1700" dirty="0">
+                <a:solidFill>
+                  <a:schemeClr val="tx1"/>
+                </a:solidFill>
+              </a:rPr>
+              <a:t>Every number on these slides is the book's, and both companions check it</a:t>
+            </a:r>
+            <a:endParaRPr lang="en-US" sz="1700" dirty="0"/>
+          </a:p>
+        </p:txBody>
+      </p:sp>
+      <p:sp>
+        <p:nvSpPr>
+          <p:cNvPr id="25" name="Slide Number Placeholder 0"/>
+          <p:cNvSpPr>
+            <a:spLocks noGrp="1"/>
+          </p:cNvSpPr>
+          <p:nvPr>
+            <p:ph type="sldNum" sz="quarter" idx="4294967295"/>
+          </p:nvPr>
+        </p:nvSpPr>
+        <p:spPr>
+          <a:xfrm>
+            <a:off x="11094415" y="6382512"/>
+            <a:ext cx="548640" cy="237744"/>
+          </a:xfrm>
+          <a:prstGeom prst="rect">
+            <a:avLst/>
+          </a:prstGeom>
+          <a:extLst>
+            <a:ext uri="{C572A759-6A51-4108-AA02-DFA0A04FC94B}">
+              <ma14:wrappingTextBoxFlag xmlns:ma14="http://schemas.microsoft.com/office/mac/drawingml/2011/main" val="0"/>
+            </a:ext>
+          </a:extLst>
+        </p:spPr>
+        <p:txBody>
+          <a:bodyPr/>
+          <a:lstStyle>
+            <a:lvl1pPr>
+              <a:defRPr sz="1000">
+                <a:solidFill>
+                  <a:srgbClr val="5A6B82"/>
+                </a:solidFill>
+              </a:defRPr>
+            </a:lvl1pPr>
+          </a:lstStyle>
+          <a:p>
+            <a:pPr algn="r"/>
+            <a:fld id="{F7021451-1387-4CA6-816F-3879F97B5CBC}" type="slidenum">
+              <a:rPr b="0" lang="en-US"/>
+              <a:t>24</a:t>
+            </a:fld>
+            <a:endParaRPr lang="en-US"/>
+          </a:p>
+        </p:txBody>
+      </p:sp>
+    </p:spTree>
+  </p:cSld>
+  <p:clrMapOvr>
+    <a:masterClrMapping/>
+  </p:clrMapOvr>
+</p:sld>
+</file>
+
+<file path=ppt/slides/slide25.xml><?xml version="1.0" encoding="utf-8"?>
+<p:sld xmlns:a="http://schemas.openxmlformats.org/drawingml/2006/main" xmlns:r="http://schemas.openxmlformats.org/officeDocument/2006/relationships" xmlns:p="http://schemas.openxmlformats.org/presentationml/2006/main">
+  <p:cSld name="Slide 25">
+    <p:spTree>
+      <p:nvGrpSpPr>
+        <p:cNvPr id="1" name=""/>
+        <p:cNvGrpSpPr/>
+        <p:nvPr/>
+      </p:nvGrpSpPr>
+      <p:grpSpPr>
+        <a:xfrm>
+          <a:off x="0" y="0"/>
+          <a:ext cx="0" cy="0"/>
+          <a:chOff x="0" y="0"/>
+          <a:chExt cx="0" cy="0"/>
+        </a:xfrm>
+      </p:grpSpPr>
+      <p:sp>
+        <p:nvSpPr>
+          <p:cNvPr id="3" name="Text 1"/>
+          <p:cNvSpPr/>
+          <p:nvPr>
+            <p:ph idx="102" type="body" hasCustomPrompt="1"/>
+          </p:nvPr>
+        </p:nvSpPr>
+        <p:spPr>
+          <a:xfrm>
+            <a:off x="548640" y="347472"/>
+            <a:ext cx="11094415" cy="292608"/>
+          </a:xfrm>
+          <a:prstGeom prst="rect">
+            <a:avLst/>
+          </a:prstGeom>
+          <a:noFill/>
+          <a:ln/>
+        </p:spPr>
+        <p:txBody>
+          <a:bodyPr wrap="square" lIns="0" tIns="0" rIns="0" bIns="0" rtlCol="0"/>
+          <a:lstStyle/>
+          <a:p>
+            <a:pPr indent="0" marL="0">
+              <a:buNone/>
+            </a:pPr>
+            <a:r>
+              <a:rPr lang="en-US" sz="1200" b="1" spc="200" kern="0" dirty="0">
+                <a:solidFill>
+                  <a:schemeClr val="accent1"/>
+                </a:solidFill>
+              </a:rPr>
               <a:t>NEXT · CHAPTER 5</a:t>
             </a:r>
             <a:endParaRPr lang="en-US" sz="1200" dirty="0"/>
@@ -18416,7 +19487,7 @@
             <a:pPr algn="r"/>
             <a:fld id="{F7021451-1387-4CA6-816F-3879F97B5CBC}" type="slidenum">
               <a:rPr b="0" lang="en-US"/>
-              <a:t>24</a:t>
+              <a:t>25</a:t>
             </a:fld>
             <a:endParaRPr lang="en-US"/>
           </a:p>
@@ -19169,7 +20240,7 @@
                 <a:ea typeface="Cambria" pitchFamily="34" charset="-122"/>
                 <a:cs typeface="Cambria" pitchFamily="34" charset="-120"/>
               </a:rPr>
-              <a:t>Six sections, a worked example and a lab</a:t>
+              <a:t>Six sections, a worked example, a case and a lab</a:t>
             </a:r>
             <a:endParaRPr lang="en-US" sz="3200" dirty="0"/>
           </a:p>
@@ -19184,11 +20255,11 @@
         <p:spPr>
           <a:xfrm>
             <a:off x="548640" y="1691640"/>
-            <a:ext cx="2567864" cy="2103120"/>
+            <a:ext cx="1999427" cy="2103120"/>
           </a:xfrm>
           <a:prstGeom prst="roundRect">
             <a:avLst>
-              <a:gd name="adj" fmla="val 3478"/>
+              <a:gd name="adj" fmla="val 3659"/>
             </a:avLst>
           </a:prstGeom>
           <a:solidFill>
@@ -19211,7 +20282,7 @@
         <p:spPr>
           <a:xfrm>
             <a:off x="731520" y="1819656"/>
-            <a:ext cx="2202104" cy="310896"/>
+            <a:ext cx="1633667" cy="310896"/>
           </a:xfrm>
           <a:prstGeom prst="rect">
             <a:avLst/>
@@ -19247,7 +20318,7 @@
         <p:spPr>
           <a:xfrm>
             <a:off x="731520" y="2148840"/>
-            <a:ext cx="2202104" cy="1060704"/>
+            <a:ext cx="1633667" cy="1060704"/>
           </a:xfrm>
           <a:prstGeom prst="rect">
             <a:avLst/>
@@ -19263,7 +20334,7 @@
               <a:buNone/>
             </a:pPr>
             <a:r>
-              <a:rPr lang="en-US" sz="1500" b="1" dirty="0">
+              <a:rPr lang="en-US" sz="1300" b="1" dirty="0">
                 <a:solidFill>
                   <a:schemeClr val="tx1"/>
                 </a:solidFill>
@@ -19273,7 +20344,7 @@
               </a:rPr>
               <a:t>What Is Lost Beyond Convexity</a:t>
             </a:r>
-            <a:endParaRPr lang="en-US" sz="1500" dirty="0"/>
+            <a:endParaRPr lang="en-US" sz="1300" dirty="0"/>
           </a:p>
         </p:txBody>
       </p:sp>
@@ -19286,7 +20357,7 @@
         <p:spPr>
           <a:xfrm>
             <a:off x="731520" y="3282696"/>
-            <a:ext cx="2202104" cy="384048"/>
+            <a:ext cx="1633667" cy="384048"/>
           </a:xfrm>
           <a:prstGeom prst="rect">
             <a:avLst/>
@@ -19302,14 +20373,14 @@
               <a:buNone/>
             </a:pPr>
             <a:r>
-              <a:rPr lang="en-US" sz="1300" dirty="0">
+              <a:rPr lang="en-US" sz="1200" dirty="0">
                 <a:solidFill>
                   <a:schemeClr val="tx2"/>
                 </a:solidFill>
               </a:rPr>
               <a:t>Proposition 4.1 · Table 4.1</a:t>
             </a:r>
-            <a:endParaRPr lang="en-US" sz="1300" dirty="0"/>
+            <a:endParaRPr lang="en-US" sz="1200" dirty="0"/>
           </a:p>
         </p:txBody>
       </p:sp>
@@ -19321,12 +20392,12 @@
         </p:nvSpPr>
         <p:spPr>
           <a:xfrm>
-            <a:off x="3390824" y="1691640"/>
-            <a:ext cx="2567864" cy="2103120"/>
+            <a:off x="2822387" y="1691640"/>
+            <a:ext cx="1999427" cy="2103120"/>
           </a:xfrm>
           <a:prstGeom prst="roundRect">
             <a:avLst>
-              <a:gd name="adj" fmla="val 3478"/>
+              <a:gd name="adj" fmla="val 3659"/>
             </a:avLst>
           </a:prstGeom>
           <a:solidFill>
@@ -19348,8 +20419,8 @@
         </p:nvSpPr>
         <p:spPr>
           <a:xfrm>
-            <a:off x="3573704" y="1819656"/>
-            <a:ext cx="2202104" cy="310896"/>
+            <a:off x="3005267" y="1819656"/>
+            <a:ext cx="1633667" cy="310896"/>
           </a:xfrm>
           <a:prstGeom prst="rect">
             <a:avLst/>
@@ -19384,8 +20455,8 @@
         </p:nvSpPr>
         <p:spPr>
           <a:xfrm>
-            <a:off x="3573704" y="2148840"/>
-            <a:ext cx="2202104" cy="1060704"/>
+            <a:off x="3005267" y="2148840"/>
+            <a:ext cx="1633667" cy="1060704"/>
           </a:xfrm>
           <a:prstGeom prst="rect">
             <a:avLst/>
@@ -19401,7 +20472,7 @@
               <a:buNone/>
             </a:pPr>
             <a:r>
-              <a:rPr lang="en-US" sz="1500" b="1" dirty="0">
+              <a:rPr lang="en-US" sz="1300" b="1" dirty="0">
                 <a:solidFill>
                   <a:schemeClr val="tx1"/>
                 </a:solidFill>
@@ -19411,7 +20482,7 @@
               </a:rPr>
               <a:t>Local Answers</a:t>
             </a:r>
-            <a:endParaRPr lang="en-US" sz="1500" dirty="0"/>
+            <a:endParaRPr lang="en-US" sz="1300" dirty="0"/>
           </a:p>
         </p:txBody>
       </p:sp>
@@ -19423,8 +20494,8 @@
         </p:nvSpPr>
         <p:spPr>
           <a:xfrm>
-            <a:off x="3573704" y="3282696"/>
-            <a:ext cx="2202104" cy="384048"/>
+            <a:off x="3005267" y="3282696"/>
+            <a:ext cx="1633667" cy="384048"/>
           </a:xfrm>
           <a:prstGeom prst="rect">
             <a:avLst/>
@@ -19440,14 +20511,14 @@
               <a:buNone/>
             </a:pPr>
             <a:r>
-              <a:rPr lang="en-US" sz="1300" dirty="0">
+              <a:rPr lang="en-US" sz="1200" dirty="0">
                 <a:solidFill>
                   <a:schemeClr val="tx2"/>
                 </a:solidFill>
               </a:rPr>
               <a:t>Theorem 4.1 · Proposition 4.2</a:t>
             </a:r>
-            <a:endParaRPr lang="en-US" sz="1300" dirty="0"/>
+            <a:endParaRPr lang="en-US" sz="1200" dirty="0"/>
           </a:p>
         </p:txBody>
       </p:sp>
@@ -19459,12 +20530,12 @@
         </p:nvSpPr>
         <p:spPr>
           <a:xfrm>
-            <a:off x="6233008" y="1691640"/>
-            <a:ext cx="2567864" cy="2103120"/>
+            <a:off x="5096134" y="1691640"/>
+            <a:ext cx="1999427" cy="2103120"/>
           </a:xfrm>
           <a:prstGeom prst="roundRect">
             <a:avLst>
-              <a:gd name="adj" fmla="val 3478"/>
+              <a:gd name="adj" fmla="val 3659"/>
             </a:avLst>
           </a:prstGeom>
           <a:solidFill>
@@ -19486,8 +20557,8 @@
         </p:nvSpPr>
         <p:spPr>
           <a:xfrm>
-            <a:off x="6415888" y="1819656"/>
-            <a:ext cx="2202104" cy="310896"/>
+            <a:off x="5279014" y="1819656"/>
+            <a:ext cx="1633667" cy="310896"/>
           </a:xfrm>
           <a:prstGeom prst="rect">
             <a:avLst/>
@@ -19522,8 +20593,8 @@
         </p:nvSpPr>
         <p:spPr>
           <a:xfrm>
-            <a:off x="6415888" y="2148840"/>
-            <a:ext cx="2202104" cy="1060704"/>
+            <a:off x="5279014" y="2148840"/>
+            <a:ext cx="1633667" cy="1060704"/>
           </a:xfrm>
           <a:prstGeom prst="rect">
             <a:avLst/>
@@ -19539,7 +20610,7 @@
               <a:buNone/>
             </a:pPr>
             <a:r>
-              <a:rPr lang="en-US" sz="1500" b="1" dirty="0">
+              <a:rPr lang="en-US" sz="1300" b="1" dirty="0">
                 <a:solidFill>
                   <a:schemeClr val="tx1"/>
                 </a:solidFill>
@@ -19549,7 +20620,7 @@
               </a:rPr>
               <a:t>Multipliers and Local Prices</a:t>
             </a:r>
-            <a:endParaRPr lang="en-US" sz="1500" dirty="0"/>
+            <a:endParaRPr lang="en-US" sz="1300" dirty="0"/>
           </a:p>
         </p:txBody>
       </p:sp>
@@ -19561,8 +20632,8 @@
         </p:nvSpPr>
         <p:spPr>
           <a:xfrm>
-            <a:off x="6415888" y="3282696"/>
-            <a:ext cx="2202104" cy="384048"/>
+            <a:off x="5279014" y="3282696"/>
+            <a:ext cx="1633667" cy="384048"/>
           </a:xfrm>
           <a:prstGeom prst="rect">
             <a:avLst/>
@@ -19578,14 +20649,14 @@
               <a:buNone/>
             </a:pPr>
             <a:r>
-              <a:rPr lang="en-US" sz="1300" dirty="0">
+              <a:rPr lang="en-US" sz="1200" dirty="0">
                 <a:solidFill>
                   <a:schemeClr val="tx2"/>
                 </a:solidFill>
               </a:rPr>
               <a:t>Theorems 4.2–4.3</a:t>
             </a:r>
-            <a:endParaRPr lang="en-US" sz="1300" dirty="0"/>
+            <a:endParaRPr lang="en-US" sz="1200" dirty="0"/>
           </a:p>
         </p:txBody>
       </p:sp>
@@ -19597,12 +20668,12 @@
         </p:nvSpPr>
         <p:spPr>
           <a:xfrm>
-            <a:off x="9075191" y="1691640"/>
-            <a:ext cx="2567864" cy="2103120"/>
+            <a:off x="7369881" y="1691640"/>
+            <a:ext cx="1999427" cy="2103120"/>
           </a:xfrm>
           <a:prstGeom prst="roundRect">
             <a:avLst>
-              <a:gd name="adj" fmla="val 3478"/>
+              <a:gd name="adj" fmla="val 3659"/>
             </a:avLst>
           </a:prstGeom>
           <a:solidFill>
@@ -19624,8 +20695,8 @@
         </p:nvSpPr>
         <p:spPr>
           <a:xfrm>
-            <a:off x="9258071" y="1819656"/>
-            <a:ext cx="2202104" cy="310896"/>
+            <a:off x="7552761" y="1819656"/>
+            <a:ext cx="1633667" cy="310896"/>
           </a:xfrm>
           <a:prstGeom prst="rect">
             <a:avLst/>
@@ -19660,8 +20731,8 @@
         </p:nvSpPr>
         <p:spPr>
           <a:xfrm>
-            <a:off x="9258071" y="2148840"/>
-            <a:ext cx="2202104" cy="1060704"/>
+            <a:off x="7552761" y="2148840"/>
+            <a:ext cx="1633667" cy="1060704"/>
           </a:xfrm>
           <a:prstGeom prst="rect">
             <a:avLst/>
@@ -19677,7 +20748,7 @@
               <a:buNone/>
             </a:pPr>
             <a:r>
-              <a:rPr lang="en-US" sz="1500" b="1" dirty="0">
+              <a:rPr lang="en-US" sz="1300" b="1" dirty="0">
                 <a:solidFill>
                   <a:schemeClr val="tx1"/>
                 </a:solidFill>
@@ -19687,7 +20758,7 @@
               </a:rPr>
               <a:t>Searching Smooth Landscapes</a:t>
             </a:r>
-            <a:endParaRPr lang="en-US" sz="1500" dirty="0"/>
+            <a:endParaRPr lang="en-US" sz="1300" dirty="0"/>
           </a:p>
         </p:txBody>
       </p:sp>
@@ -19699,8 +20770,8 @@
         </p:nvSpPr>
         <p:spPr>
           <a:xfrm>
-            <a:off x="9258071" y="3282696"/>
-            <a:ext cx="2202104" cy="384048"/>
+            <a:off x="7552761" y="3282696"/>
+            <a:ext cx="1633667" cy="384048"/>
           </a:xfrm>
           <a:prstGeom prst="rect">
             <a:avLst/>
@@ -19716,14 +20787,14 @@
               <a:buNone/>
             </a:pPr>
             <a:r>
-              <a:rPr lang="en-US" sz="1300" dirty="0">
+              <a:rPr lang="en-US" sz="1200" dirty="0">
                 <a:solidFill>
                   <a:schemeClr val="tx2"/>
                 </a:solidFill>
               </a:rPr>
               <a:t>Table 4.2 · multistart</a:t>
             </a:r>
-            <a:endParaRPr lang="en-US" sz="1300" dirty="0"/>
+            <a:endParaRPr lang="en-US" sz="1200" dirty="0"/>
           </a:p>
         </p:txBody>
       </p:sp>
@@ -19735,12 +20806,12 @@
         </p:nvSpPr>
         <p:spPr>
           <a:xfrm>
-            <a:off x="548640" y="4069080"/>
-            <a:ext cx="2567864" cy="2103120"/>
+            <a:off x="9643628" y="1691640"/>
+            <a:ext cx="1999427" cy="2103120"/>
           </a:xfrm>
           <a:prstGeom prst="roundRect">
             <a:avLst>
-              <a:gd name="adj" fmla="val 3478"/>
+              <a:gd name="adj" fmla="val 3659"/>
             </a:avLst>
           </a:prstGeom>
           <a:solidFill>
@@ -19762,8 +20833,8 @@
         </p:nvSpPr>
         <p:spPr>
           <a:xfrm>
-            <a:off x="731520" y="4197096"/>
-            <a:ext cx="2202104" cy="310896"/>
+            <a:off x="9826508" y="1819656"/>
+            <a:ext cx="1633667" cy="310896"/>
           </a:xfrm>
           <a:prstGeom prst="rect">
             <a:avLst/>
@@ -19798,8 +20869,8 @@
         </p:nvSpPr>
         <p:spPr>
           <a:xfrm>
-            <a:off x="731520" y="4526280"/>
-            <a:ext cx="2202104" cy="1060704"/>
+            <a:off x="9826508" y="2148840"/>
+            <a:ext cx="1633667" cy="1060704"/>
           </a:xfrm>
           <a:prstGeom prst="rect">
             <a:avLst/>
@@ -19815,7 +20886,7 @@
               <a:buNone/>
             </a:pPr>
             <a:r>
-              <a:rPr lang="en-US" sz="1500" b="1" dirty="0">
+              <a:rPr lang="en-US" sz="1300" b="1" dirty="0">
                 <a:solidFill>
                   <a:schemeClr val="tx1"/>
                 </a:solidFill>
@@ -19825,7 +20896,7 @@
               </a:rPr>
               <a:t>Lumpy Decisions and Branch-and-Bound</a:t>
             </a:r>
-            <a:endParaRPr lang="en-US" sz="1500" dirty="0"/>
+            <a:endParaRPr lang="en-US" sz="1300" dirty="0"/>
           </a:p>
         </p:txBody>
       </p:sp>
@@ -19837,8 +20908,8 @@
         </p:nvSpPr>
         <p:spPr>
           <a:xfrm>
-            <a:off x="731520" y="5660136"/>
-            <a:ext cx="2202104" cy="384048"/>
+            <a:off x="9826508" y="3282696"/>
+            <a:ext cx="1633667" cy="384048"/>
           </a:xfrm>
           <a:prstGeom prst="rect">
             <a:avLst/>
@@ -19854,14 +20925,14 @@
               <a:buNone/>
             </a:pPr>
             <a:r>
-              <a:rPr lang="en-US" sz="1300" dirty="0">
+              <a:rPr lang="en-US" sz="1200" dirty="0">
                 <a:solidFill>
                   <a:schemeClr val="tx2"/>
                 </a:solidFill>
               </a:rPr>
               <a:t>Theorem 4.4 · Table 4.3</a:t>
             </a:r>
-            <a:endParaRPr lang="en-US" sz="1300" dirty="0"/>
+            <a:endParaRPr lang="en-US" sz="1200" dirty="0"/>
           </a:p>
         </p:txBody>
       </p:sp>
@@ -19873,12 +20944,12 @@
         </p:nvSpPr>
         <p:spPr>
           <a:xfrm>
-            <a:off x="3390824" y="4069080"/>
-            <a:ext cx="2567864" cy="2103120"/>
+            <a:off x="548640" y="4069080"/>
+            <a:ext cx="1999427" cy="2103120"/>
           </a:xfrm>
           <a:prstGeom prst="roundRect">
             <a:avLst>
-              <a:gd name="adj" fmla="val 3478"/>
+              <a:gd name="adj" fmla="val 3659"/>
             </a:avLst>
           </a:prstGeom>
           <a:solidFill>
@@ -19900,8 +20971,8 @@
         </p:nvSpPr>
         <p:spPr>
           <a:xfrm>
-            <a:off x="3573704" y="4197096"/>
-            <a:ext cx="2202104" cy="310896"/>
+            <a:off x="731520" y="4197096"/>
+            <a:ext cx="1633667" cy="310896"/>
           </a:xfrm>
           <a:prstGeom prst="rect">
             <a:avLst/>
@@ -19936,8 +21007,8 @@
         </p:nvSpPr>
         <p:spPr>
           <a:xfrm>
-            <a:off x="3573704" y="4526280"/>
-            <a:ext cx="2202104" cy="1060704"/>
+            <a:off x="731520" y="4526280"/>
+            <a:ext cx="1633667" cy="1060704"/>
           </a:xfrm>
           <a:prstGeom prst="rect">
             <a:avLst/>
@@ -19953,7 +21024,7 @@
               <a:buNone/>
             </a:pPr>
             <a:r>
-              <a:rPr lang="en-US" sz="1500" b="1" dirty="0">
+              <a:rPr lang="en-US" sz="1300" b="1" dirty="0">
                 <a:solidFill>
                   <a:schemeClr val="tx1"/>
                 </a:solidFill>
@@ -19963,7 +21034,7 @@
               </a:rPr>
               <a:t>Decomposition, and the Road to Policies</a:t>
             </a:r>
-            <a:endParaRPr lang="en-US" sz="1500" dirty="0"/>
+            <a:endParaRPr lang="en-US" sz="1300" dirty="0"/>
           </a:p>
         </p:txBody>
       </p:sp>
@@ -19975,8 +21046,8 @@
         </p:nvSpPr>
         <p:spPr>
           <a:xfrm>
-            <a:off x="3573704" y="5660136"/>
-            <a:ext cx="2202104" cy="384048"/>
+            <a:off x="731520" y="5660136"/>
+            <a:ext cx="1633667" cy="384048"/>
           </a:xfrm>
           <a:prstGeom prst="rect">
             <a:avLst/>
@@ -19992,14 +21063,14 @@
               <a:buNone/>
             </a:pPr>
             <a:r>
-              <a:rPr lang="en-US" sz="1300" dirty="0">
+              <a:rPr lang="en-US" sz="1200" dirty="0">
                 <a:solidFill>
                   <a:schemeClr val="tx2"/>
                 </a:solidFill>
               </a:rPr>
               <a:t>Theorem 4.5</a:t>
             </a:r>
-            <a:endParaRPr lang="en-US" sz="1300" dirty="0"/>
+            <a:endParaRPr lang="en-US" sz="1200" dirty="0"/>
           </a:p>
         </p:txBody>
       </p:sp>
@@ -20011,12 +21082,12 @@
         </p:nvSpPr>
         <p:spPr>
           <a:xfrm>
-            <a:off x="6233008" y="4069080"/>
-            <a:ext cx="2567864" cy="2103120"/>
+            <a:off x="2822387" y="4069080"/>
+            <a:ext cx="1999427" cy="2103120"/>
           </a:xfrm>
           <a:prstGeom prst="roundRect">
             <a:avLst>
-              <a:gd name="adj" fmla="val 3478"/>
+              <a:gd name="adj" fmla="val 3659"/>
             </a:avLst>
           </a:prstGeom>
           <a:solidFill>
@@ -20038,8 +21109,8 @@
         </p:nvSpPr>
         <p:spPr>
           <a:xfrm>
-            <a:off x="6415888" y="4197096"/>
-            <a:ext cx="2202104" cy="310896"/>
+            <a:off x="3005267" y="4197096"/>
+            <a:ext cx="1633667" cy="310896"/>
           </a:xfrm>
           <a:prstGeom prst="rect">
             <a:avLst/>
@@ -20074,8 +21145,8 @@
         </p:nvSpPr>
         <p:spPr>
           <a:xfrm>
-            <a:off x="6415888" y="4526280"/>
-            <a:ext cx="2202104" cy="1060704"/>
+            <a:off x="3005267" y="4526280"/>
+            <a:ext cx="1633667" cy="1060704"/>
           </a:xfrm>
           <a:prstGeom prst="rect">
             <a:avLst/>
@@ -20091,7 +21162,7 @@
               <a:buNone/>
             </a:pPr>
             <a:r>
-              <a:rPr lang="en-US" sz="1500" b="1" dirty="0">
+              <a:rPr lang="en-US" sz="1300" b="1" dirty="0">
                 <a:solidFill>
                   <a:schemeClr val="bg1"/>
                 </a:solidFill>
@@ -20101,7 +21172,7 @@
               </a:rPr>
               <a:t>Can Meridian Automate Part of a Line?</a:t>
             </a:r>
-            <a:endParaRPr lang="en-US" sz="1500" dirty="0"/>
+            <a:endParaRPr lang="en-US" sz="1300" dirty="0"/>
           </a:p>
         </p:txBody>
       </p:sp>
@@ -20113,8 +21184,8 @@
         </p:nvSpPr>
         <p:spPr>
           <a:xfrm>
-            <a:off x="6415888" y="5660136"/>
-            <a:ext cx="2202104" cy="384048"/>
+            <a:off x="3005267" y="5660136"/>
+            <a:ext cx="1633667" cy="384048"/>
           </a:xfrm>
           <a:prstGeom prst="rect">
             <a:avLst/>
@@ -20130,14 +21201,14 @@
               <a:buNone/>
             </a:pPr>
             <a:r>
-              <a:rPr lang="en-US" sz="1300" dirty="0">
+              <a:rPr lang="en-US" sz="1200" dirty="0">
                 <a:solidFill>
                   <a:schemeClr val="bg2"/>
                 </a:solidFill>
               </a:rPr>
               <a:t>Table 4.4 · Figures 4.1, 4.3</a:t>
             </a:r>
-            <a:endParaRPr lang="en-US" sz="1300" dirty="0"/>
+            <a:endParaRPr lang="en-US" sz="1200" dirty="0"/>
           </a:p>
         </p:txBody>
       </p:sp>
@@ -20149,12 +21220,12 @@
         </p:nvSpPr>
         <p:spPr>
           <a:xfrm>
-            <a:off x="9075191" y="4069080"/>
-            <a:ext cx="2567864" cy="2103120"/>
+            <a:off x="5096134" y="4069080"/>
+            <a:ext cx="1999427" cy="2103120"/>
           </a:xfrm>
           <a:prstGeom prst="roundRect">
             <a:avLst>
-              <a:gd name="adj" fmla="val 3478"/>
+              <a:gd name="adj" fmla="val 3659"/>
             </a:avLst>
           </a:prstGeom>
           <a:solidFill>
@@ -20176,8 +21247,8 @@
         </p:nvSpPr>
         <p:spPr>
           <a:xfrm>
-            <a:off x="9258071" y="4197096"/>
-            <a:ext cx="2202104" cy="310896"/>
+            <a:off x="5279014" y="4197096"/>
+            <a:ext cx="1633667" cy="310896"/>
           </a:xfrm>
           <a:prstGeom prst="rect">
             <a:avLst/>
@@ -20198,7 +21269,7 @@
                   <a:schemeClr val="accent1"/>
                 </a:solidFill>
               </a:rPr>
-              <a:t>AXIOM Lab 2.4</a:t>
+              <a:t>In Practice</a:t>
             </a:r>
             <a:endParaRPr lang="en-US" sz="1300" dirty="0"/>
           </a:p>
@@ -20212,8 +21283,8 @@
         </p:nvSpPr>
         <p:spPr>
           <a:xfrm>
-            <a:off x="9258071" y="4526280"/>
-            <a:ext cx="2202104" cy="1060704"/>
+            <a:off x="5279014" y="4526280"/>
+            <a:ext cx="1633667" cy="1060704"/>
           </a:xfrm>
           <a:prstGeom prst="rect">
             <a:avLst/>
@@ -20229,7 +21300,7 @@
               <a:buNone/>
             </a:pPr>
             <a:r>
-              <a:rPr lang="en-US" sz="1500" b="1" dirty="0">
+              <a:rPr lang="en-US" sz="1300" b="1" dirty="0">
                 <a:solidFill>
                   <a:schemeClr val="tx1"/>
                 </a:solidFill>
@@ -20237,9 +21308,9 @@
                 <a:ea typeface="Cambria" pitchFamily="34" charset="-122"/>
                 <a:cs typeface="Cambria" pitchFamily="34" charset="-120"/>
               </a:rPr>
-              <a:t>Local Search, Bounds, and Branch-and-Bound</a:t>
-            </a:r>
-            <a:endParaRPr lang="en-US" sz="1500" dirty="0"/>
+              <a:t>The NFL Builds Its Season</a:t>
+            </a:r>
+            <a:endParaRPr lang="en-US" sz="1300" dirty="0"/>
           </a:p>
         </p:txBody>
       </p:sp>
@@ -20251,8 +21322,8 @@
         </p:nvSpPr>
         <p:spPr>
           <a:xfrm>
-            <a:off x="9258071" y="5660136"/>
-            <a:ext cx="2202104" cy="384048"/>
+            <a:off x="5279014" y="5660136"/>
+            <a:ext cx="1633667" cy="384048"/>
           </a:xfrm>
           <a:prstGeom prst="rect">
             <a:avLst/>
@@ -20268,14 +21339,152 @@
               <a:buNone/>
             </a:pPr>
             <a:r>
-              <a:rPr lang="en-US" sz="1300" dirty="0">
+              <a:rPr lang="en-US" sz="1200" dirty="0">
                 <a:solidFill>
                   <a:schemeClr val="tx2"/>
                 </a:solidFill>
               </a:rPr>
+              <a:t>At a Glance · board questions</a:t>
+            </a:r>
+            <a:endParaRPr lang="en-US" sz="1200" dirty="0"/>
+          </a:p>
+        </p:txBody>
+      </p:sp>
+      <p:sp>
+        <p:nvSpPr>
+          <p:cNvPr id="37" name="Card"/>
+          <p:cNvSpPr/>
+          <p:nvPr/>
+        </p:nvSpPr>
+        <p:spPr>
+          <a:xfrm>
+            <a:off x="7369881" y="4069080"/>
+            <a:ext cx="1999427" cy="2103120"/>
+          </a:xfrm>
+          <a:prstGeom prst="roundRect">
+            <a:avLst>
+              <a:gd name="adj" fmla="val 3659"/>
+            </a:avLst>
+          </a:prstGeom>
+          <a:solidFill>
+            <a:schemeClr val="bg2"/>
+          </a:solidFill>
+          <a:ln w="9525">
+            <a:solidFill>
+              <a:srgbClr val="C4CBD8"/>
+            </a:solidFill>
+            <a:prstDash val="solid"/>
+          </a:ln>
+        </p:spPr>
+      </p:sp>
+      <p:sp>
+        <p:nvSpPr>
+          <p:cNvPr id="38" name="Card label"/>
+          <p:cNvSpPr txBox="1"/>
+          <p:nvPr/>
+        </p:nvSpPr>
+        <p:spPr>
+          <a:xfrm>
+            <a:off x="7552761" y="4197096"/>
+            <a:ext cx="1633667" cy="310896"/>
+          </a:xfrm>
+          <a:prstGeom prst="rect">
+            <a:avLst/>
+          </a:prstGeom>
+          <a:noFill/>
+          <a:ln/>
+        </p:spPr>
+        <p:txBody>
+          <a:bodyPr wrap="square" lIns="0" tIns="0" rIns="0" bIns="0" rtlCol="0" anchor="ctr"/>
+          <a:lstStyle/>
+          <a:p>
+            <a:pPr indent="0" marL="0">
+              <a:buNone/>
+            </a:pPr>
+            <a:r>
+              <a:rPr lang="en-US" sz="1300" b="1" dirty="0">
+                <a:solidFill>
+                  <a:schemeClr val="accent1"/>
+                </a:solidFill>
+              </a:rPr>
+              <a:t>AXIOM Lab 2.4</a:t>
+            </a:r>
+            <a:endParaRPr lang="en-US" sz="1300" dirty="0"/>
+          </a:p>
+        </p:txBody>
+      </p:sp>
+      <p:sp>
+        <p:nvSpPr>
+          <p:cNvPr id="39" name="Card head"/>
+          <p:cNvSpPr txBox="1"/>
+          <p:nvPr/>
+        </p:nvSpPr>
+        <p:spPr>
+          <a:xfrm>
+            <a:off x="7552761" y="4526280"/>
+            <a:ext cx="1633667" cy="1060704"/>
+          </a:xfrm>
+          <a:prstGeom prst="rect">
+            <a:avLst/>
+          </a:prstGeom>
+          <a:noFill/>
+          <a:ln/>
+        </p:spPr>
+        <p:txBody>
+          <a:bodyPr wrap="square" lIns="0" tIns="0" rIns="0" bIns="0" rtlCol="0" anchor="t"/>
+          <a:lstStyle/>
+          <a:p>
+            <a:pPr indent="0" marL="0">
+              <a:buNone/>
+            </a:pPr>
+            <a:r>
+              <a:rPr lang="en-US" sz="1300" b="1" dirty="0">
+                <a:solidFill>
+                  <a:schemeClr val="tx1"/>
+                </a:solidFill>
+                <a:latin typeface="Cambria" pitchFamily="34" charset="0"/>
+                <a:ea typeface="Cambria" pitchFamily="34" charset="-122"/>
+                <a:cs typeface="Cambria" pitchFamily="34" charset="-120"/>
+              </a:rPr>
+              <a:t>Local Search, Bounds, and Branch-and-Bound</a:t>
+            </a:r>
+            <a:endParaRPr lang="en-US" sz="1300" dirty="0"/>
+          </a:p>
+        </p:txBody>
+      </p:sp>
+      <p:sp>
+        <p:nvSpPr>
+          <p:cNvPr id="40" name="Card text"/>
+          <p:cNvSpPr txBox="1"/>
+          <p:nvPr/>
+        </p:nvSpPr>
+        <p:spPr>
+          <a:xfrm>
+            <a:off x="7552761" y="5660136"/>
+            <a:ext cx="1633667" cy="384048"/>
+          </a:xfrm>
+          <a:prstGeom prst="rect">
+            <a:avLst/>
+          </a:prstGeom>
+          <a:noFill/>
+          <a:ln/>
+        </p:spPr>
+        <p:txBody>
+          <a:bodyPr wrap="square" lIns="0" tIns="0" rIns="0" bIns="0" rtlCol="0" anchor="t"/>
+          <a:lstStyle/>
+          <a:p>
+            <a:pPr indent="0" marL="0">
+              <a:buNone/>
+            </a:pPr>
+            <a:r>
+              <a:rPr lang="en-US" sz="1200" dirty="0">
+                <a:solidFill>
+                  <a:schemeClr val="tx2"/>
+                </a:solidFill>
+              </a:rPr>
               <a:t>AXIOM-04 · five steps</a:t>
             </a:r>
-            <a:endParaRPr lang="en-US" sz="1300" dirty="0"/>
+            <a:endParaRPr lang="en-US" sz="1200" dirty="0"/>
           </a:p>
         </p:txBody>
       </p:sp>
